--- a/docs/pptx/whole/ritu-linsubhr-ratio-hosp8.pptx
+++ b/docs/pptx/whole/ritu-linsubhr-ratio-hosp8.pptx
@@ -2443,7 +2443,7 @@
           </p:nvSpPr>
           <p:spPr>
             <a:xfrm>
-              <a:off x="1424129" y="2073503"/>
+              <a:off x="1425728" y="2073503"/>
               <a:ext cx="0" cy="3649639"/>
             </a:xfrm>
             <a:custGeom>
@@ -2486,7 +2486,7 @@
           </p:nvSpPr>
           <p:spPr>
             <a:xfrm>
-              <a:off x="3298684" y="2073503"/>
+              <a:off x="3298283" y="2073503"/>
               <a:ext cx="0" cy="3649639"/>
             </a:xfrm>
             <a:custGeom>
@@ -2529,7 +2529,7 @@
           </p:nvSpPr>
           <p:spPr>
             <a:xfrm>
-              <a:off x="5173239" y="2073503"/>
+              <a:off x="5170839" y="2073503"/>
               <a:ext cx="0" cy="3649639"/>
             </a:xfrm>
             <a:custGeom>
@@ -2572,7 +2572,7 @@
           </p:nvSpPr>
           <p:spPr>
             <a:xfrm>
-              <a:off x="7047795" y="2073503"/>
+              <a:off x="7043395" y="2073503"/>
               <a:ext cx="0" cy="3649639"/>
             </a:xfrm>
             <a:custGeom>
@@ -2830,7 +2830,7 @@
           </p:nvSpPr>
           <p:spPr>
             <a:xfrm>
-              <a:off x="2361407" y="2073503"/>
+              <a:off x="2362006" y="2073503"/>
               <a:ext cx="0" cy="3649639"/>
             </a:xfrm>
             <a:custGeom>
@@ -2873,7 +2873,7 @@
           </p:nvSpPr>
           <p:spPr>
             <a:xfrm>
-              <a:off x="4235962" y="2073503"/>
+              <a:off x="4234561" y="2073503"/>
               <a:ext cx="0" cy="3649639"/>
             </a:xfrm>
             <a:custGeom>
@@ -2916,7 +2916,7 @@
           </p:nvSpPr>
           <p:spPr>
             <a:xfrm>
-              <a:off x="6110517" y="2073503"/>
+              <a:off x="6107117" y="2073503"/>
               <a:ext cx="0" cy="3649639"/>
             </a:xfrm>
             <a:custGeom>
@@ -2959,7 +2959,7 @@
           </p:nvSpPr>
           <p:spPr>
             <a:xfrm>
-              <a:off x="7985072" y="2073503"/>
+              <a:off x="7979673" y="2073503"/>
               <a:ext cx="0" cy="3649639"/>
             </a:xfrm>
             <a:custGeom>
@@ -3003,542 +3003,542 @@
           <p:spPr>
             <a:xfrm>
               <a:off x="1172049" y="2073503"/>
-              <a:ext cx="7090630" cy="3468021"/>
+              <a:ext cx="7090630" cy="3467942"/>
             </a:xfrm>
             <a:custGeom>
               <a:avLst/>
               <a:pathLst>
-                <a:path w="7090630" h="3468021">
+                <a:path w="7090630" h="3467942">
                   <a:moveTo>
-                    <a:pt x="1712697" y="0"/>
+                    <a:pt x="1711285" y="0"/>
                   </a:moveTo>
                   <a:lnTo>
-                    <a:pt x="1718940" y="22499"/>
-                  </a:lnTo>
-                  <a:lnTo>
-                    <a:pt x="1790563" y="262695"/>
-                  </a:lnTo>
-                  <a:lnTo>
-                    <a:pt x="1862185" y="486223"/>
-                  </a:lnTo>
-                  <a:lnTo>
-                    <a:pt x="1933808" y="694238"/>
-                  </a:lnTo>
-                  <a:lnTo>
-                    <a:pt x="2005430" y="887818"/>
-                  </a:lnTo>
-                  <a:lnTo>
-                    <a:pt x="2077053" y="1067965"/>
-                  </a:lnTo>
-                  <a:lnTo>
-                    <a:pt x="2148675" y="1235610"/>
-                  </a:lnTo>
-                  <a:lnTo>
-                    <a:pt x="2220298" y="1391621"/>
-                  </a:lnTo>
-                  <a:lnTo>
-                    <a:pt x="2291920" y="1536806"/>
-                  </a:lnTo>
-                  <a:lnTo>
-                    <a:pt x="2363543" y="1671915"/>
-                  </a:lnTo>
-                  <a:lnTo>
-                    <a:pt x="2435165" y="1797649"/>
-                  </a:lnTo>
-                  <a:lnTo>
-                    <a:pt x="2506788" y="1914657"/>
-                  </a:lnTo>
-                  <a:lnTo>
-                    <a:pt x="2578410" y="2023545"/>
-                  </a:lnTo>
-                  <a:lnTo>
-                    <a:pt x="2650033" y="2124877"/>
-                  </a:lnTo>
-                  <a:lnTo>
-                    <a:pt x="2721655" y="2219177"/>
-                  </a:lnTo>
-                  <a:lnTo>
-                    <a:pt x="2793278" y="2306933"/>
-                  </a:lnTo>
-                  <a:lnTo>
-                    <a:pt x="2864901" y="2388599"/>
-                  </a:lnTo>
-                  <a:lnTo>
-                    <a:pt x="2936523" y="2464597"/>
-                  </a:lnTo>
-                  <a:lnTo>
-                    <a:pt x="3008146" y="2535322"/>
-                  </a:lnTo>
-                  <a:lnTo>
-                    <a:pt x="3079768" y="2601139"/>
-                  </a:lnTo>
-                  <a:lnTo>
-                    <a:pt x="3151391" y="2652710"/>
-                  </a:lnTo>
-                  <a:lnTo>
-                    <a:pt x="3223013" y="2641096"/>
-                  </a:lnTo>
-                  <a:lnTo>
-                    <a:pt x="3294636" y="2629320"/>
-                  </a:lnTo>
-                  <a:lnTo>
-                    <a:pt x="3366258" y="2617379"/>
-                  </a:lnTo>
-                  <a:lnTo>
-                    <a:pt x="3437881" y="2605272"/>
-                  </a:lnTo>
-                  <a:lnTo>
-                    <a:pt x="3509503" y="2592995"/>
-                  </a:lnTo>
-                  <a:lnTo>
-                    <a:pt x="3581126" y="2580547"/>
-                  </a:lnTo>
-                  <a:lnTo>
-                    <a:pt x="3652748" y="2567925"/>
-                  </a:lnTo>
-                  <a:lnTo>
-                    <a:pt x="3724371" y="2555126"/>
-                  </a:lnTo>
-                  <a:lnTo>
-                    <a:pt x="3795993" y="2542148"/>
-                  </a:lnTo>
-                  <a:lnTo>
-                    <a:pt x="3867616" y="2528990"/>
-                  </a:lnTo>
-                  <a:lnTo>
-                    <a:pt x="3939238" y="2515647"/>
-                  </a:lnTo>
-                  <a:lnTo>
-                    <a:pt x="4010861" y="2502118"/>
-                  </a:lnTo>
-                  <a:lnTo>
-                    <a:pt x="4082483" y="2488399"/>
-                  </a:lnTo>
-                  <a:lnTo>
-                    <a:pt x="4154106" y="2474489"/>
-                  </a:lnTo>
-                  <a:lnTo>
-                    <a:pt x="4225729" y="2460385"/>
-                  </a:lnTo>
-                  <a:lnTo>
-                    <a:pt x="4297351" y="2446083"/>
-                  </a:lnTo>
-                  <a:lnTo>
-                    <a:pt x="4368974" y="2431582"/>
-                  </a:lnTo>
-                  <a:lnTo>
-                    <a:pt x="4440596" y="2416878"/>
-                  </a:lnTo>
-                  <a:lnTo>
-                    <a:pt x="4512219" y="2401968"/>
-                  </a:lnTo>
-                  <a:lnTo>
-                    <a:pt x="4583841" y="2386851"/>
-                  </a:lnTo>
-                  <a:lnTo>
-                    <a:pt x="4655464" y="2371521"/>
-                  </a:lnTo>
-                  <a:lnTo>
-                    <a:pt x="4727086" y="2355978"/>
-                  </a:lnTo>
-                  <a:lnTo>
-                    <a:pt x="4798709" y="2340217"/>
-                  </a:lnTo>
-                  <a:lnTo>
-                    <a:pt x="4870331" y="2324237"/>
-                  </a:lnTo>
-                  <a:lnTo>
-                    <a:pt x="4941954" y="2308032"/>
-                  </a:lnTo>
-                  <a:lnTo>
-                    <a:pt x="5013576" y="2291602"/>
-                  </a:lnTo>
-                  <a:lnTo>
-                    <a:pt x="5085199" y="2274941"/>
-                  </a:lnTo>
-                  <a:lnTo>
-                    <a:pt x="5156821" y="2258048"/>
-                  </a:lnTo>
-                  <a:lnTo>
-                    <a:pt x="5228444" y="2240919"/>
-                  </a:lnTo>
-                  <a:lnTo>
-                    <a:pt x="5300066" y="2223551"/>
-                  </a:lnTo>
-                  <a:lnTo>
-                    <a:pt x="5371689" y="2205939"/>
-                  </a:lnTo>
-                  <a:lnTo>
-                    <a:pt x="5443311" y="2188082"/>
-                  </a:lnTo>
-                  <a:lnTo>
-                    <a:pt x="5514934" y="2169975"/>
-                  </a:lnTo>
-                  <a:lnTo>
-                    <a:pt x="5586557" y="2151615"/>
-                  </a:lnTo>
-                  <a:lnTo>
-                    <a:pt x="5658179" y="2132999"/>
-                  </a:lnTo>
-                  <a:lnTo>
-                    <a:pt x="5729802" y="2114122"/>
-                  </a:lnTo>
-                  <a:lnTo>
-                    <a:pt x="5801424" y="2094981"/>
-                  </a:lnTo>
-                  <a:lnTo>
-                    <a:pt x="5873047" y="2075573"/>
-                  </a:lnTo>
-                  <a:lnTo>
-                    <a:pt x="5944669" y="2055894"/>
-                  </a:lnTo>
-                  <a:lnTo>
-                    <a:pt x="6016292" y="2035940"/>
-                  </a:lnTo>
-                  <a:lnTo>
-                    <a:pt x="6087914" y="2015707"/>
-                  </a:lnTo>
-                  <a:lnTo>
-                    <a:pt x="6159537" y="1995191"/>
-                  </a:lnTo>
-                  <a:lnTo>
-                    <a:pt x="6231159" y="1974388"/>
-                  </a:lnTo>
-                  <a:lnTo>
-                    <a:pt x="6302782" y="1953295"/>
-                  </a:lnTo>
-                  <a:lnTo>
-                    <a:pt x="6374404" y="1931907"/>
-                  </a:lnTo>
-                  <a:lnTo>
-                    <a:pt x="6446027" y="1910220"/>
-                  </a:lnTo>
-                  <a:lnTo>
-                    <a:pt x="6517649" y="1888229"/>
-                  </a:lnTo>
-                  <a:lnTo>
-                    <a:pt x="6589272" y="1865932"/>
-                  </a:lnTo>
-                  <a:lnTo>
-                    <a:pt x="6660894" y="1843323"/>
-                  </a:lnTo>
-                  <a:lnTo>
-                    <a:pt x="6732517" y="1820398"/>
-                  </a:lnTo>
-                  <a:lnTo>
-                    <a:pt x="6804139" y="1797153"/>
-                  </a:lnTo>
-                  <a:lnTo>
-                    <a:pt x="6875762" y="1773583"/>
-                  </a:lnTo>
-                  <a:lnTo>
-                    <a:pt x="6947385" y="1749683"/>
-                  </a:lnTo>
-                  <a:lnTo>
-                    <a:pt x="7019007" y="1725449"/>
-                  </a:lnTo>
-                  <a:lnTo>
-                    <a:pt x="7090630" y="1700877"/>
-                  </a:lnTo>
-                  <a:lnTo>
-                    <a:pt x="7090630" y="3468021"/>
-                  </a:lnTo>
-                  <a:lnTo>
-                    <a:pt x="7019007" y="3466848"/>
-                  </a:lnTo>
-                  <a:lnTo>
-                    <a:pt x="6947385" y="3465588"/>
-                  </a:lnTo>
-                  <a:lnTo>
-                    <a:pt x="6875762" y="3464234"/>
-                  </a:lnTo>
-                  <a:lnTo>
-                    <a:pt x="6804139" y="3462779"/>
-                  </a:lnTo>
-                  <a:lnTo>
-                    <a:pt x="6732517" y="3461215"/>
-                  </a:lnTo>
-                  <a:lnTo>
-                    <a:pt x="6660894" y="3459535"/>
-                  </a:lnTo>
-                  <a:lnTo>
-                    <a:pt x="6589272" y="3457730"/>
-                  </a:lnTo>
-                  <a:lnTo>
-                    <a:pt x="6517649" y="3455790"/>
-                  </a:lnTo>
-                  <a:lnTo>
-                    <a:pt x="6446027" y="3453705"/>
-                  </a:lnTo>
-                  <a:lnTo>
-                    <a:pt x="6374404" y="3451465"/>
-                  </a:lnTo>
-                  <a:lnTo>
-                    <a:pt x="6302782" y="3449057"/>
-                  </a:lnTo>
-                  <a:lnTo>
-                    <a:pt x="6231159" y="3446471"/>
-                  </a:lnTo>
-                  <a:lnTo>
-                    <a:pt x="6159537" y="3443691"/>
-                  </a:lnTo>
-                  <a:lnTo>
-                    <a:pt x="6087914" y="3440704"/>
-                  </a:lnTo>
-                  <a:lnTo>
-                    <a:pt x="6016292" y="3437494"/>
-                  </a:lnTo>
-                  <a:lnTo>
-                    <a:pt x="5944669" y="3434045"/>
-                  </a:lnTo>
-                  <a:lnTo>
-                    <a:pt x="5873047" y="3430339"/>
-                  </a:lnTo>
-                  <a:lnTo>
-                    <a:pt x="5801424" y="3426356"/>
-                  </a:lnTo>
-                  <a:lnTo>
-                    <a:pt x="5729802" y="3422077"/>
-                  </a:lnTo>
-                  <a:lnTo>
-                    <a:pt x="5658179" y="3417478"/>
-                  </a:lnTo>
-                  <a:lnTo>
-                    <a:pt x="5586557" y="3412536"/>
-                  </a:lnTo>
-                  <a:lnTo>
-                    <a:pt x="5514934" y="3407226"/>
-                  </a:lnTo>
-                  <a:lnTo>
-                    <a:pt x="5443311" y="3401520"/>
-                  </a:lnTo>
-                  <a:lnTo>
-                    <a:pt x="5371689" y="3395388"/>
-                  </a:lnTo>
-                  <a:lnTo>
-                    <a:pt x="5300066" y="3388799"/>
-                  </a:lnTo>
-                  <a:lnTo>
-                    <a:pt x="5228444" y="3381719"/>
-                  </a:lnTo>
-                  <a:lnTo>
-                    <a:pt x="5156821" y="3374110"/>
-                  </a:lnTo>
-                  <a:lnTo>
-                    <a:pt x="5085199" y="3365935"/>
-                  </a:lnTo>
-                  <a:lnTo>
-                    <a:pt x="5013576" y="3357150"/>
-                  </a:lnTo>
-                  <a:lnTo>
-                    <a:pt x="4941954" y="3347709"/>
-                  </a:lnTo>
-                  <a:lnTo>
-                    <a:pt x="4870331" y="3337565"/>
-                  </a:lnTo>
-                  <a:lnTo>
-                    <a:pt x="4798709" y="3326664"/>
-                  </a:lnTo>
-                  <a:lnTo>
-                    <a:pt x="4727086" y="3314950"/>
-                  </a:lnTo>
-                  <a:lnTo>
-                    <a:pt x="4655464" y="3302363"/>
-                  </a:lnTo>
-                  <a:lnTo>
-                    <a:pt x="4583841" y="3288837"/>
-                  </a:lnTo>
-                  <a:lnTo>
-                    <a:pt x="4512219" y="3274302"/>
-                  </a:lnTo>
-                  <a:lnTo>
-                    <a:pt x="4440596" y="3258684"/>
-                  </a:lnTo>
-                  <a:lnTo>
-                    <a:pt x="4368974" y="3241901"/>
-                  </a:lnTo>
-                  <a:lnTo>
-                    <a:pt x="4297351" y="3223866"/>
-                  </a:lnTo>
-                  <a:lnTo>
-                    <a:pt x="4225729" y="3204487"/>
-                  </a:lnTo>
-                  <a:lnTo>
-                    <a:pt x="4154106" y="3183662"/>
-                  </a:lnTo>
-                  <a:lnTo>
-                    <a:pt x="4082483" y="3161285"/>
-                  </a:lnTo>
-                  <a:lnTo>
-                    <a:pt x="4010861" y="3137239"/>
-                  </a:lnTo>
-                  <a:lnTo>
-                    <a:pt x="3939238" y="3111399"/>
-                  </a:lnTo>
-                  <a:lnTo>
-                    <a:pt x="3867616" y="3083633"/>
-                  </a:lnTo>
-                  <a:lnTo>
-                    <a:pt x="3795993" y="3053796"/>
-                  </a:lnTo>
-                  <a:lnTo>
-                    <a:pt x="3724371" y="3021735"/>
-                  </a:lnTo>
-                  <a:lnTo>
-                    <a:pt x="3652748" y="2987282"/>
-                  </a:lnTo>
-                  <a:lnTo>
-                    <a:pt x="3581126" y="2950261"/>
-                  </a:lnTo>
-                  <a:lnTo>
-                    <a:pt x="3509503" y="2910478"/>
-                  </a:lnTo>
-                  <a:lnTo>
-                    <a:pt x="3437881" y="2867729"/>
-                  </a:lnTo>
-                  <a:lnTo>
-                    <a:pt x="3366258" y="2821792"/>
-                  </a:lnTo>
-                  <a:lnTo>
-                    <a:pt x="3294636" y="2772430"/>
-                  </a:lnTo>
-                  <a:lnTo>
-                    <a:pt x="3223013" y="2719387"/>
-                  </a:lnTo>
-                  <a:lnTo>
-                    <a:pt x="3151391" y="2662388"/>
-                  </a:lnTo>
-                  <a:lnTo>
-                    <a:pt x="3079768" y="2664163"/>
-                  </a:lnTo>
-                  <a:lnTo>
-                    <a:pt x="3008146" y="2675459"/>
-                  </a:lnTo>
-                  <a:lnTo>
-                    <a:pt x="2936523" y="2686599"/>
-                  </a:lnTo>
-                  <a:lnTo>
-                    <a:pt x="2864901" y="2697586"/>
-                  </a:lnTo>
-                  <a:lnTo>
-                    <a:pt x="2793278" y="2708421"/>
-                  </a:lnTo>
-                  <a:lnTo>
-                    <a:pt x="2721655" y="2719107"/>
-                  </a:lnTo>
-                  <a:lnTo>
-                    <a:pt x="2650033" y="2729646"/>
-                  </a:lnTo>
-                  <a:lnTo>
-                    <a:pt x="2578410" y="2740039"/>
-                  </a:lnTo>
-                  <a:lnTo>
-                    <a:pt x="2506788" y="2750289"/>
-                  </a:lnTo>
-                  <a:lnTo>
-                    <a:pt x="2435165" y="2760398"/>
-                  </a:lnTo>
-                  <a:lnTo>
-                    <a:pt x="2363543" y="2770367"/>
-                  </a:lnTo>
-                  <a:lnTo>
-                    <a:pt x="2291920" y="2780199"/>
-                  </a:lnTo>
-                  <a:lnTo>
-                    <a:pt x="2220298" y="2789896"/>
-                  </a:lnTo>
-                  <a:lnTo>
-                    <a:pt x="2148675" y="2799459"/>
-                  </a:lnTo>
-                  <a:lnTo>
-                    <a:pt x="2077053" y="2808890"/>
-                  </a:lnTo>
-                  <a:lnTo>
-                    <a:pt x="2005430" y="2818191"/>
-                  </a:lnTo>
-                  <a:lnTo>
-                    <a:pt x="1933808" y="2827364"/>
-                  </a:lnTo>
-                  <a:lnTo>
-                    <a:pt x="1862185" y="2836411"/>
-                  </a:lnTo>
-                  <a:lnTo>
-                    <a:pt x="1790563" y="2845333"/>
-                  </a:lnTo>
-                  <a:lnTo>
-                    <a:pt x="1718940" y="2854131"/>
-                  </a:lnTo>
-                  <a:lnTo>
-                    <a:pt x="1647318" y="2862809"/>
-                  </a:lnTo>
-                  <a:lnTo>
-                    <a:pt x="1575695" y="2871367"/>
-                  </a:lnTo>
-                  <a:lnTo>
-                    <a:pt x="1504073" y="2879807"/>
-                  </a:lnTo>
-                  <a:lnTo>
-                    <a:pt x="1432450" y="2888131"/>
-                  </a:lnTo>
-                  <a:lnTo>
-                    <a:pt x="1360827" y="2896340"/>
-                  </a:lnTo>
-                  <a:lnTo>
-                    <a:pt x="1289205" y="2904436"/>
-                  </a:lnTo>
-                  <a:lnTo>
-                    <a:pt x="1217582" y="2912420"/>
-                  </a:lnTo>
-                  <a:lnTo>
-                    <a:pt x="1145960" y="2920294"/>
-                  </a:lnTo>
-                  <a:lnTo>
-                    <a:pt x="1074337" y="2928060"/>
-                  </a:lnTo>
-                  <a:lnTo>
-                    <a:pt x="1002715" y="2935719"/>
-                  </a:lnTo>
-                  <a:lnTo>
-                    <a:pt x="931092" y="2943272"/>
-                  </a:lnTo>
-                  <a:lnTo>
-                    <a:pt x="859470" y="2950721"/>
-                  </a:lnTo>
-                  <a:lnTo>
-                    <a:pt x="787847" y="2958067"/>
-                  </a:lnTo>
-                  <a:lnTo>
-                    <a:pt x="716225" y="2965313"/>
-                  </a:lnTo>
-                  <a:lnTo>
-                    <a:pt x="644602" y="2972458"/>
-                  </a:lnTo>
-                  <a:lnTo>
-                    <a:pt x="572980" y="2979505"/>
-                  </a:lnTo>
-                  <a:lnTo>
-                    <a:pt x="501357" y="2986454"/>
-                  </a:lnTo>
-                  <a:lnTo>
-                    <a:pt x="429735" y="2993308"/>
-                  </a:lnTo>
-                  <a:lnTo>
-                    <a:pt x="358112" y="3000068"/>
-                  </a:lnTo>
-                  <a:lnTo>
-                    <a:pt x="286490" y="3006734"/>
-                  </a:lnTo>
-                  <a:lnTo>
-                    <a:pt x="214867" y="3013308"/>
-                  </a:lnTo>
-                  <a:lnTo>
-                    <a:pt x="143245" y="3019792"/>
-                  </a:lnTo>
-                  <a:lnTo>
-                    <a:pt x="71622" y="3026186"/>
-                  </a:lnTo>
-                  <a:lnTo>
-                    <a:pt x="0" y="3032493"/>
+                    <a:pt x="1718940" y="27511"/>
+                  </a:lnTo>
+                  <a:lnTo>
+                    <a:pt x="1790563" y="267084"/>
+                  </a:lnTo>
+                  <a:lnTo>
+                    <a:pt x="1862185" y="490050"/>
+                  </a:lnTo>
+                  <a:lnTo>
+                    <a:pt x="1933808" y="697561"/>
+                  </a:lnTo>
+                  <a:lnTo>
+                    <a:pt x="2005430" y="890688"/>
+                  </a:lnTo>
+                  <a:lnTo>
+                    <a:pt x="2077053" y="1070429"/>
+                  </a:lnTo>
+                  <a:lnTo>
+                    <a:pt x="2148675" y="1237710"/>
+                  </a:lnTo>
+                  <a:lnTo>
+                    <a:pt x="2220298" y="1393397"/>
+                  </a:lnTo>
+                  <a:lnTo>
+                    <a:pt x="2291920" y="1538291"/>
+                  </a:lnTo>
+                  <a:lnTo>
+                    <a:pt x="2363543" y="1673143"/>
+                  </a:lnTo>
+                  <a:lnTo>
+                    <a:pt x="2435165" y="1798646"/>
+                  </a:lnTo>
+                  <a:lnTo>
+                    <a:pt x="2506788" y="1915451"/>
+                  </a:lnTo>
+                  <a:lnTo>
+                    <a:pt x="2578410" y="2024159"/>
+                  </a:lnTo>
+                  <a:lnTo>
+                    <a:pt x="2650033" y="2125332"/>
+                  </a:lnTo>
+                  <a:lnTo>
+                    <a:pt x="2721655" y="2219492"/>
+                  </a:lnTo>
+                  <a:lnTo>
+                    <a:pt x="2793278" y="2307125"/>
+                  </a:lnTo>
+                  <a:lnTo>
+                    <a:pt x="2864901" y="2388683"/>
+                  </a:lnTo>
+                  <a:lnTo>
+                    <a:pt x="2936523" y="2464589"/>
+                  </a:lnTo>
+                  <a:lnTo>
+                    <a:pt x="3008146" y="2535233"/>
+                  </a:lnTo>
+                  <a:lnTo>
+                    <a:pt x="3079768" y="2600980"/>
+                  </a:lnTo>
+                  <a:lnTo>
+                    <a:pt x="3151391" y="2652702"/>
+                  </a:lnTo>
+                  <a:lnTo>
+                    <a:pt x="3223013" y="2640716"/>
+                  </a:lnTo>
+                  <a:lnTo>
+                    <a:pt x="3294636" y="2628558"/>
+                  </a:lnTo>
+                  <a:lnTo>
+                    <a:pt x="3366258" y="2616224"/>
+                  </a:lnTo>
+                  <a:lnTo>
+                    <a:pt x="3437881" y="2603713"/>
+                  </a:lnTo>
+                  <a:lnTo>
+                    <a:pt x="3509503" y="2591021"/>
+                  </a:lnTo>
+                  <a:lnTo>
+                    <a:pt x="3581126" y="2578146"/>
+                  </a:lnTo>
+                  <a:lnTo>
+                    <a:pt x="3652748" y="2565085"/>
+                  </a:lnTo>
+                  <a:lnTo>
+                    <a:pt x="3724371" y="2551836"/>
+                  </a:lnTo>
+                  <a:lnTo>
+                    <a:pt x="3795993" y="2538396"/>
+                  </a:lnTo>
+                  <a:lnTo>
+                    <a:pt x="3867616" y="2524762"/>
+                  </a:lnTo>
+                  <a:lnTo>
+                    <a:pt x="3939238" y="2510931"/>
+                  </a:lnTo>
+                  <a:lnTo>
+                    <a:pt x="4010861" y="2496901"/>
+                  </a:lnTo>
+                  <a:lnTo>
+                    <a:pt x="4082483" y="2482669"/>
+                  </a:lnTo>
+                  <a:lnTo>
+                    <a:pt x="4154106" y="2468231"/>
+                  </a:lnTo>
+                  <a:lnTo>
+                    <a:pt x="4225729" y="2453585"/>
+                  </a:lnTo>
+                  <a:lnTo>
+                    <a:pt x="4297351" y="2438728"/>
+                  </a:lnTo>
+                  <a:lnTo>
+                    <a:pt x="4368974" y="2423657"/>
+                  </a:lnTo>
+                  <a:lnTo>
+                    <a:pt x="4440596" y="2408368"/>
+                  </a:lnTo>
+                  <a:lnTo>
+                    <a:pt x="4512219" y="2392858"/>
+                  </a:lnTo>
+                  <a:lnTo>
+                    <a:pt x="4583841" y="2377126"/>
+                  </a:lnTo>
+                  <a:lnTo>
+                    <a:pt x="4655464" y="2361166"/>
+                  </a:lnTo>
+                  <a:lnTo>
+                    <a:pt x="4727086" y="2344976"/>
+                  </a:lnTo>
+                  <a:lnTo>
+                    <a:pt x="4798709" y="2328552"/>
+                  </a:lnTo>
+                  <a:lnTo>
+                    <a:pt x="4870331" y="2311892"/>
+                  </a:lnTo>
+                  <a:lnTo>
+                    <a:pt x="4941954" y="2294991"/>
+                  </a:lnTo>
+                  <a:lnTo>
+                    <a:pt x="5013576" y="2277847"/>
+                  </a:lnTo>
+                  <a:lnTo>
+                    <a:pt x="5085199" y="2260455"/>
+                  </a:lnTo>
+                  <a:lnTo>
+                    <a:pt x="5156821" y="2242812"/>
+                  </a:lnTo>
+                  <a:lnTo>
+                    <a:pt x="5228444" y="2224916"/>
+                  </a:lnTo>
+                  <a:lnTo>
+                    <a:pt x="5300066" y="2206760"/>
+                  </a:lnTo>
+                  <a:lnTo>
+                    <a:pt x="5371689" y="2188344"/>
+                  </a:lnTo>
+                  <a:lnTo>
+                    <a:pt x="5443311" y="2169661"/>
+                  </a:lnTo>
+                  <a:lnTo>
+                    <a:pt x="5514934" y="2150709"/>
+                  </a:lnTo>
+                  <a:lnTo>
+                    <a:pt x="5586557" y="2131484"/>
+                  </a:lnTo>
+                  <a:lnTo>
+                    <a:pt x="5658179" y="2111981"/>
+                  </a:lnTo>
+                  <a:lnTo>
+                    <a:pt x="5729802" y="2092198"/>
+                  </a:lnTo>
+                  <a:lnTo>
+                    <a:pt x="5801424" y="2072128"/>
+                  </a:lnTo>
+                  <a:lnTo>
+                    <a:pt x="5873047" y="2051770"/>
+                  </a:lnTo>
+                  <a:lnTo>
+                    <a:pt x="5944669" y="2031118"/>
+                  </a:lnTo>
+                  <a:lnTo>
+                    <a:pt x="6016292" y="2010168"/>
+                  </a:lnTo>
+                  <a:lnTo>
+                    <a:pt x="6087914" y="1988915"/>
+                  </a:lnTo>
+                  <a:lnTo>
+                    <a:pt x="6159537" y="1967357"/>
+                  </a:lnTo>
+                  <a:lnTo>
+                    <a:pt x="6231159" y="1945487"/>
+                  </a:lnTo>
+                  <a:lnTo>
+                    <a:pt x="6302782" y="1923302"/>
+                  </a:lnTo>
+                  <a:lnTo>
+                    <a:pt x="6374404" y="1900797"/>
+                  </a:lnTo>
+                  <a:lnTo>
+                    <a:pt x="6446027" y="1877968"/>
+                  </a:lnTo>
+                  <a:lnTo>
+                    <a:pt x="6517649" y="1854809"/>
+                  </a:lnTo>
+                  <a:lnTo>
+                    <a:pt x="6589272" y="1831316"/>
+                  </a:lnTo>
+                  <a:lnTo>
+                    <a:pt x="6660894" y="1807485"/>
+                  </a:lnTo>
+                  <a:lnTo>
+                    <a:pt x="6732517" y="1783309"/>
+                  </a:lnTo>
+                  <a:lnTo>
+                    <a:pt x="6804139" y="1758785"/>
+                  </a:lnTo>
+                  <a:lnTo>
+                    <a:pt x="6875762" y="1733908"/>
+                  </a:lnTo>
+                  <a:lnTo>
+                    <a:pt x="6947385" y="1708671"/>
+                  </a:lnTo>
+                  <a:lnTo>
+                    <a:pt x="7019007" y="1683071"/>
+                  </a:lnTo>
+                  <a:lnTo>
+                    <a:pt x="7090630" y="1657101"/>
+                  </a:lnTo>
+                  <a:lnTo>
+                    <a:pt x="7090630" y="3467942"/>
+                  </a:lnTo>
+                  <a:lnTo>
+                    <a:pt x="7019007" y="3466765"/>
+                  </a:lnTo>
+                  <a:lnTo>
+                    <a:pt x="6947385" y="3465500"/>
+                  </a:lnTo>
+                  <a:lnTo>
+                    <a:pt x="6875762" y="3464142"/>
+                  </a:lnTo>
+                  <a:lnTo>
+                    <a:pt x="6804139" y="3462681"/>
+                  </a:lnTo>
+                  <a:lnTo>
+                    <a:pt x="6732517" y="3461112"/>
+                  </a:lnTo>
+                  <a:lnTo>
+                    <a:pt x="6660894" y="3459427"/>
+                  </a:lnTo>
+                  <a:lnTo>
+                    <a:pt x="6589272" y="3457615"/>
+                  </a:lnTo>
+                  <a:lnTo>
+                    <a:pt x="6517649" y="3455669"/>
+                  </a:lnTo>
+                  <a:lnTo>
+                    <a:pt x="6446027" y="3453578"/>
+                  </a:lnTo>
+                  <a:lnTo>
+                    <a:pt x="6374404" y="3451331"/>
+                  </a:lnTo>
+                  <a:lnTo>
+                    <a:pt x="6302782" y="3448917"/>
+                  </a:lnTo>
+                  <a:lnTo>
+                    <a:pt x="6231159" y="3446323"/>
+                  </a:lnTo>
+                  <a:lnTo>
+                    <a:pt x="6159537" y="3443536"/>
+                  </a:lnTo>
+                  <a:lnTo>
+                    <a:pt x="6087914" y="3440541"/>
+                  </a:lnTo>
+                  <a:lnTo>
+                    <a:pt x="6016292" y="3437323"/>
+                  </a:lnTo>
+                  <a:lnTo>
+                    <a:pt x="5944669" y="3433865"/>
+                  </a:lnTo>
+                  <a:lnTo>
+                    <a:pt x="5873047" y="3430150"/>
+                  </a:lnTo>
+                  <a:lnTo>
+                    <a:pt x="5801424" y="3426159"/>
+                  </a:lnTo>
+                  <a:lnTo>
+                    <a:pt x="5729802" y="3421870"/>
+                  </a:lnTo>
+                  <a:lnTo>
+                    <a:pt x="5658179" y="3417261"/>
+                  </a:lnTo>
+                  <a:lnTo>
+                    <a:pt x="5586557" y="3412309"/>
+                  </a:lnTo>
+                  <a:lnTo>
+                    <a:pt x="5514934" y="3406989"/>
+                  </a:lnTo>
+                  <a:lnTo>
+                    <a:pt x="5443311" y="3401272"/>
+                  </a:lnTo>
+                  <a:lnTo>
+                    <a:pt x="5371689" y="3395129"/>
+                  </a:lnTo>
+                  <a:lnTo>
+                    <a:pt x="5300066" y="3388529"/>
+                  </a:lnTo>
+                  <a:lnTo>
+                    <a:pt x="5228444" y="3381438"/>
+                  </a:lnTo>
+                  <a:lnTo>
+                    <a:pt x="5156821" y="3373818"/>
+                  </a:lnTo>
+                  <a:lnTo>
+                    <a:pt x="5085199" y="3365630"/>
+                  </a:lnTo>
+                  <a:lnTo>
+                    <a:pt x="5013576" y="3356833"/>
+                  </a:lnTo>
+                  <a:lnTo>
+                    <a:pt x="4941954" y="3347381"/>
+                  </a:lnTo>
+                  <a:lnTo>
+                    <a:pt x="4870331" y="3337225"/>
+                  </a:lnTo>
+                  <a:lnTo>
+                    <a:pt x="4798709" y="3326312"/>
+                  </a:lnTo>
+                  <a:lnTo>
+                    <a:pt x="4727086" y="3314587"/>
+                  </a:lnTo>
+                  <a:lnTo>
+                    <a:pt x="4655464" y="3301988"/>
+                  </a:lnTo>
+                  <a:lnTo>
+                    <a:pt x="4583841" y="3288451"/>
+                  </a:lnTo>
+                  <a:lnTo>
+                    <a:pt x="4512219" y="3273905"/>
+                  </a:lnTo>
+                  <a:lnTo>
+                    <a:pt x="4440596" y="3258277"/>
+                  </a:lnTo>
+                  <a:lnTo>
+                    <a:pt x="4368974" y="3241484"/>
+                  </a:lnTo>
+                  <a:lnTo>
+                    <a:pt x="4297351" y="3223441"/>
+                  </a:lnTo>
+                  <a:lnTo>
+                    <a:pt x="4225729" y="3204053"/>
+                  </a:lnTo>
+                  <a:lnTo>
+                    <a:pt x="4154106" y="3183222"/>
+                  </a:lnTo>
+                  <a:lnTo>
+                    <a:pt x="4082483" y="3160840"/>
+                  </a:lnTo>
+                  <a:lnTo>
+                    <a:pt x="4010861" y="3136790"/>
+                  </a:lnTo>
+                  <a:lnTo>
+                    <a:pt x="3939238" y="3110949"/>
+                  </a:lnTo>
+                  <a:lnTo>
+                    <a:pt x="3867616" y="3083184"/>
+                  </a:lnTo>
+                  <a:lnTo>
+                    <a:pt x="3795993" y="3053350"/>
+                  </a:lnTo>
+                  <a:lnTo>
+                    <a:pt x="3724371" y="3021295"/>
+                  </a:lnTo>
+                  <a:lnTo>
+                    <a:pt x="3652748" y="2986852"/>
+                  </a:lnTo>
+                  <a:lnTo>
+                    <a:pt x="3581126" y="2949845"/>
+                  </a:lnTo>
+                  <a:lnTo>
+                    <a:pt x="3509503" y="2910080"/>
+                  </a:lnTo>
+                  <a:lnTo>
+                    <a:pt x="3437881" y="2867354"/>
+                  </a:lnTo>
+                  <a:lnTo>
+                    <a:pt x="3366258" y="2821446"/>
+                  </a:lnTo>
+                  <a:lnTo>
+                    <a:pt x="3294636" y="2772119"/>
+                  </a:lnTo>
+                  <a:lnTo>
+                    <a:pt x="3223013" y="2719118"/>
+                  </a:lnTo>
+                  <a:lnTo>
+                    <a:pt x="3151391" y="2662170"/>
+                  </a:lnTo>
+                  <a:lnTo>
+                    <a:pt x="3079768" y="2664517"/>
+                  </a:lnTo>
+                  <a:lnTo>
+                    <a:pt x="3008146" y="2676164"/>
+                  </a:lnTo>
+                  <a:lnTo>
+                    <a:pt x="2936523" y="2687645"/>
+                  </a:lnTo>
+                  <a:lnTo>
+                    <a:pt x="2864901" y="2698964"/>
+                  </a:lnTo>
+                  <a:lnTo>
+                    <a:pt x="2793278" y="2710121"/>
+                  </a:lnTo>
+                  <a:lnTo>
+                    <a:pt x="2721655" y="2721120"/>
+                  </a:lnTo>
+                  <a:lnTo>
+                    <a:pt x="2650033" y="2731962"/>
+                  </a:lnTo>
+                  <a:lnTo>
+                    <a:pt x="2578410" y="2742650"/>
+                  </a:lnTo>
+                  <a:lnTo>
+                    <a:pt x="2506788" y="2753186"/>
+                  </a:lnTo>
+                  <a:lnTo>
+                    <a:pt x="2435165" y="2763573"/>
+                  </a:lnTo>
+                  <a:lnTo>
+                    <a:pt x="2363543" y="2773812"/>
+                  </a:lnTo>
+                  <a:lnTo>
+                    <a:pt x="2291920" y="2783905"/>
+                  </a:lnTo>
+                  <a:lnTo>
+                    <a:pt x="2220298" y="2793855"/>
+                  </a:lnTo>
+                  <a:lnTo>
+                    <a:pt x="2148675" y="2803663"/>
+                  </a:lnTo>
+                  <a:lnTo>
+                    <a:pt x="2077053" y="2813332"/>
+                  </a:lnTo>
+                  <a:lnTo>
+                    <a:pt x="2005430" y="2822863"/>
+                  </a:lnTo>
+                  <a:lnTo>
+                    <a:pt x="1933808" y="2832259"/>
+                  </a:lnTo>
+                  <a:lnTo>
+                    <a:pt x="1862185" y="2841521"/>
+                  </a:lnTo>
+                  <a:lnTo>
+                    <a:pt x="1790563" y="2850652"/>
+                  </a:lnTo>
+                  <a:lnTo>
+                    <a:pt x="1718940" y="2859653"/>
+                  </a:lnTo>
+                  <a:lnTo>
+                    <a:pt x="1647318" y="2868525"/>
+                  </a:lnTo>
+                  <a:lnTo>
+                    <a:pt x="1575695" y="2877272"/>
+                  </a:lnTo>
+                  <a:lnTo>
+                    <a:pt x="1504073" y="2885894"/>
+                  </a:lnTo>
+                  <a:lnTo>
+                    <a:pt x="1432450" y="2894394"/>
+                  </a:lnTo>
+                  <a:lnTo>
+                    <a:pt x="1360827" y="2902773"/>
+                  </a:lnTo>
+                  <a:lnTo>
+                    <a:pt x="1289205" y="2911033"/>
+                  </a:lnTo>
+                  <a:lnTo>
+                    <a:pt x="1217582" y="2919175"/>
+                  </a:lnTo>
+                  <a:lnTo>
+                    <a:pt x="1145960" y="2927202"/>
+                  </a:lnTo>
+                  <a:lnTo>
+                    <a:pt x="1074337" y="2935114"/>
+                  </a:lnTo>
+                  <a:lnTo>
+                    <a:pt x="1002715" y="2942914"/>
+                  </a:lnTo>
+                  <a:lnTo>
+                    <a:pt x="931092" y="2950603"/>
+                  </a:lnTo>
+                  <a:lnTo>
+                    <a:pt x="859470" y="2958183"/>
+                  </a:lnTo>
+                  <a:lnTo>
+                    <a:pt x="787847" y="2965655"/>
+                  </a:lnTo>
+                  <a:lnTo>
+                    <a:pt x="716225" y="2973021"/>
+                  </a:lnTo>
+                  <a:lnTo>
+                    <a:pt x="644602" y="2980282"/>
+                  </a:lnTo>
+                  <a:lnTo>
+                    <a:pt x="572980" y="2987439"/>
+                  </a:lnTo>
+                  <a:lnTo>
+                    <a:pt x="501357" y="2994496"/>
+                  </a:lnTo>
+                  <a:lnTo>
+                    <a:pt x="429735" y="3001451"/>
+                  </a:lnTo>
+                  <a:lnTo>
+                    <a:pt x="358112" y="3008308"/>
+                  </a:lnTo>
+                  <a:lnTo>
+                    <a:pt x="286490" y="3015067"/>
+                  </a:lnTo>
+                  <a:lnTo>
+                    <a:pt x="214867" y="3021731"/>
+                  </a:lnTo>
+                  <a:lnTo>
+                    <a:pt x="143245" y="3028299"/>
+                  </a:lnTo>
+                  <a:lnTo>
+                    <a:pt x="71622" y="3034774"/>
+                  </a:lnTo>
+                  <a:lnTo>
+                    <a:pt x="0" y="3041157"/>
                   </a:lnTo>
                   <a:close/>
                 </a:path>
@@ -3564,243 +3564,243 @@
           </p:nvSpPr>
           <p:spPr>
             <a:xfrm>
-              <a:off x="2884746" y="2073503"/>
-              <a:ext cx="5377932" cy="2652710"/>
+              <a:off x="2883335" y="2073503"/>
+              <a:ext cx="5379344" cy="2652702"/>
             </a:xfrm>
             <a:custGeom>
               <a:avLst/>
               <a:pathLst>
-                <a:path w="5377932" h="2652710">
+                <a:path w="5379344" h="2652702">
                   <a:moveTo>
                     <a:pt x="0" y="0"/>
                   </a:moveTo>
                   <a:lnTo>
-                    <a:pt x="6243" y="22499"/>
-                  </a:lnTo>
-                  <a:lnTo>
-                    <a:pt x="77865" y="262695"/>
-                  </a:lnTo>
-                  <a:lnTo>
-                    <a:pt x="149488" y="486223"/>
-                  </a:lnTo>
-                  <a:lnTo>
-                    <a:pt x="221111" y="694238"/>
-                  </a:lnTo>
-                  <a:lnTo>
-                    <a:pt x="292733" y="887818"/>
-                  </a:lnTo>
-                  <a:lnTo>
-                    <a:pt x="364356" y="1067965"/>
-                  </a:lnTo>
-                  <a:lnTo>
-                    <a:pt x="435978" y="1235610"/>
-                  </a:lnTo>
-                  <a:lnTo>
-                    <a:pt x="507601" y="1391621"/>
-                  </a:lnTo>
-                  <a:lnTo>
-                    <a:pt x="579223" y="1536806"/>
-                  </a:lnTo>
-                  <a:lnTo>
-                    <a:pt x="650846" y="1671915"/>
-                  </a:lnTo>
-                  <a:lnTo>
-                    <a:pt x="722468" y="1797649"/>
-                  </a:lnTo>
-                  <a:lnTo>
-                    <a:pt x="794091" y="1914657"/>
-                  </a:lnTo>
-                  <a:lnTo>
-                    <a:pt x="865713" y="2023545"/>
-                  </a:lnTo>
-                  <a:lnTo>
-                    <a:pt x="937336" y="2124877"/>
-                  </a:lnTo>
-                  <a:lnTo>
-                    <a:pt x="1008958" y="2219177"/>
-                  </a:lnTo>
-                  <a:lnTo>
-                    <a:pt x="1080581" y="2306933"/>
-                  </a:lnTo>
-                  <a:lnTo>
-                    <a:pt x="1152203" y="2388599"/>
-                  </a:lnTo>
-                  <a:lnTo>
-                    <a:pt x="1223826" y="2464597"/>
-                  </a:lnTo>
-                  <a:lnTo>
-                    <a:pt x="1295448" y="2535322"/>
-                  </a:lnTo>
-                  <a:lnTo>
-                    <a:pt x="1367071" y="2601139"/>
-                  </a:lnTo>
-                  <a:lnTo>
-                    <a:pt x="1438693" y="2652710"/>
-                  </a:lnTo>
-                  <a:lnTo>
-                    <a:pt x="1510316" y="2641096"/>
-                  </a:lnTo>
-                  <a:lnTo>
-                    <a:pt x="1581939" y="2629320"/>
-                  </a:lnTo>
-                  <a:lnTo>
-                    <a:pt x="1653561" y="2617379"/>
-                  </a:lnTo>
-                  <a:lnTo>
-                    <a:pt x="1725184" y="2605272"/>
-                  </a:lnTo>
-                  <a:lnTo>
-                    <a:pt x="1796806" y="2592995"/>
-                  </a:lnTo>
-                  <a:lnTo>
-                    <a:pt x="1868429" y="2580547"/>
-                  </a:lnTo>
-                  <a:lnTo>
-                    <a:pt x="1940051" y="2567925"/>
-                  </a:lnTo>
-                  <a:lnTo>
-                    <a:pt x="2011674" y="2555126"/>
-                  </a:lnTo>
-                  <a:lnTo>
-                    <a:pt x="2083296" y="2542148"/>
-                  </a:lnTo>
-                  <a:lnTo>
-                    <a:pt x="2154919" y="2528990"/>
-                  </a:lnTo>
-                  <a:lnTo>
-                    <a:pt x="2226541" y="2515647"/>
-                  </a:lnTo>
-                  <a:lnTo>
-                    <a:pt x="2298164" y="2502118"/>
-                  </a:lnTo>
-                  <a:lnTo>
-                    <a:pt x="2369786" y="2488399"/>
-                  </a:lnTo>
-                  <a:lnTo>
-                    <a:pt x="2441409" y="2474489"/>
-                  </a:lnTo>
-                  <a:lnTo>
-                    <a:pt x="2513031" y="2460385"/>
-                  </a:lnTo>
-                  <a:lnTo>
-                    <a:pt x="2584654" y="2446083"/>
-                  </a:lnTo>
-                  <a:lnTo>
-                    <a:pt x="2656276" y="2431582"/>
-                  </a:lnTo>
-                  <a:lnTo>
-                    <a:pt x="2727899" y="2416878"/>
-                  </a:lnTo>
-                  <a:lnTo>
-                    <a:pt x="2799521" y="2401968"/>
-                  </a:lnTo>
-                  <a:lnTo>
-                    <a:pt x="2871144" y="2386851"/>
-                  </a:lnTo>
-                  <a:lnTo>
-                    <a:pt x="2942767" y="2371521"/>
-                  </a:lnTo>
-                  <a:lnTo>
-                    <a:pt x="3014389" y="2355978"/>
-                  </a:lnTo>
-                  <a:lnTo>
-                    <a:pt x="3086012" y="2340217"/>
-                  </a:lnTo>
-                  <a:lnTo>
-                    <a:pt x="3157634" y="2324237"/>
-                  </a:lnTo>
-                  <a:lnTo>
-                    <a:pt x="3229257" y="2308032"/>
-                  </a:lnTo>
-                  <a:lnTo>
-                    <a:pt x="3300879" y="2291602"/>
-                  </a:lnTo>
-                  <a:lnTo>
-                    <a:pt x="3372502" y="2274941"/>
-                  </a:lnTo>
-                  <a:lnTo>
-                    <a:pt x="3444124" y="2258048"/>
-                  </a:lnTo>
-                  <a:lnTo>
-                    <a:pt x="3515747" y="2240919"/>
-                  </a:lnTo>
-                  <a:lnTo>
-                    <a:pt x="3587369" y="2223551"/>
-                  </a:lnTo>
-                  <a:lnTo>
-                    <a:pt x="3658992" y="2205939"/>
-                  </a:lnTo>
-                  <a:lnTo>
-                    <a:pt x="3730614" y="2188082"/>
-                  </a:lnTo>
-                  <a:lnTo>
-                    <a:pt x="3802237" y="2169975"/>
-                  </a:lnTo>
-                  <a:lnTo>
-                    <a:pt x="3873859" y="2151615"/>
-                  </a:lnTo>
-                  <a:lnTo>
-                    <a:pt x="3945482" y="2132999"/>
-                  </a:lnTo>
-                  <a:lnTo>
-                    <a:pt x="4017104" y="2114122"/>
-                  </a:lnTo>
-                  <a:lnTo>
-                    <a:pt x="4088727" y="2094981"/>
-                  </a:lnTo>
-                  <a:lnTo>
-                    <a:pt x="4160349" y="2075573"/>
-                  </a:lnTo>
-                  <a:lnTo>
-                    <a:pt x="4231972" y="2055894"/>
-                  </a:lnTo>
-                  <a:lnTo>
-                    <a:pt x="4303595" y="2035940"/>
-                  </a:lnTo>
-                  <a:lnTo>
-                    <a:pt x="4375217" y="2015707"/>
-                  </a:lnTo>
-                  <a:lnTo>
-                    <a:pt x="4446840" y="1995191"/>
-                  </a:lnTo>
-                  <a:lnTo>
-                    <a:pt x="4518462" y="1974388"/>
-                  </a:lnTo>
-                  <a:lnTo>
-                    <a:pt x="4590085" y="1953295"/>
-                  </a:lnTo>
-                  <a:lnTo>
-                    <a:pt x="4661707" y="1931907"/>
-                  </a:lnTo>
-                  <a:lnTo>
-                    <a:pt x="4733330" y="1910220"/>
-                  </a:lnTo>
-                  <a:lnTo>
-                    <a:pt x="4804952" y="1888229"/>
-                  </a:lnTo>
-                  <a:lnTo>
-                    <a:pt x="4876575" y="1865932"/>
-                  </a:lnTo>
-                  <a:lnTo>
-                    <a:pt x="4948197" y="1843323"/>
-                  </a:lnTo>
-                  <a:lnTo>
-                    <a:pt x="5019820" y="1820398"/>
-                  </a:lnTo>
-                  <a:lnTo>
-                    <a:pt x="5091442" y="1797153"/>
-                  </a:lnTo>
-                  <a:lnTo>
-                    <a:pt x="5163065" y="1773583"/>
-                  </a:lnTo>
-                  <a:lnTo>
-                    <a:pt x="5234687" y="1749683"/>
-                  </a:lnTo>
-                  <a:lnTo>
-                    <a:pt x="5306310" y="1725449"/>
-                  </a:lnTo>
-                  <a:lnTo>
-                    <a:pt x="5377932" y="1700877"/>
+                    <a:pt x="7654" y="27511"/>
+                  </a:lnTo>
+                  <a:lnTo>
+                    <a:pt x="79277" y="267084"/>
+                  </a:lnTo>
+                  <a:lnTo>
+                    <a:pt x="150899" y="490050"/>
+                  </a:lnTo>
+                  <a:lnTo>
+                    <a:pt x="222522" y="697561"/>
+                  </a:lnTo>
+                  <a:lnTo>
+                    <a:pt x="294144" y="890688"/>
+                  </a:lnTo>
+                  <a:lnTo>
+                    <a:pt x="365767" y="1070429"/>
+                  </a:lnTo>
+                  <a:lnTo>
+                    <a:pt x="437389" y="1237710"/>
+                  </a:lnTo>
+                  <a:lnTo>
+                    <a:pt x="509012" y="1393397"/>
+                  </a:lnTo>
+                  <a:lnTo>
+                    <a:pt x="580634" y="1538291"/>
+                  </a:lnTo>
+                  <a:lnTo>
+                    <a:pt x="652257" y="1673143"/>
+                  </a:lnTo>
+                  <a:lnTo>
+                    <a:pt x="723880" y="1798646"/>
+                  </a:lnTo>
+                  <a:lnTo>
+                    <a:pt x="795502" y="1915451"/>
+                  </a:lnTo>
+                  <a:lnTo>
+                    <a:pt x="867125" y="2024159"/>
+                  </a:lnTo>
+                  <a:lnTo>
+                    <a:pt x="938747" y="2125332"/>
+                  </a:lnTo>
+                  <a:lnTo>
+                    <a:pt x="1010370" y="2219492"/>
+                  </a:lnTo>
+                  <a:lnTo>
+                    <a:pt x="1081992" y="2307125"/>
+                  </a:lnTo>
+                  <a:lnTo>
+                    <a:pt x="1153615" y="2388683"/>
+                  </a:lnTo>
+                  <a:lnTo>
+                    <a:pt x="1225237" y="2464589"/>
+                  </a:lnTo>
+                  <a:lnTo>
+                    <a:pt x="1296860" y="2535233"/>
+                  </a:lnTo>
+                  <a:lnTo>
+                    <a:pt x="1368482" y="2600980"/>
+                  </a:lnTo>
+                  <a:lnTo>
+                    <a:pt x="1440105" y="2652702"/>
+                  </a:lnTo>
+                  <a:lnTo>
+                    <a:pt x="1511727" y="2640716"/>
+                  </a:lnTo>
+                  <a:lnTo>
+                    <a:pt x="1583350" y="2628558"/>
+                  </a:lnTo>
+                  <a:lnTo>
+                    <a:pt x="1654972" y="2616224"/>
+                  </a:lnTo>
+                  <a:lnTo>
+                    <a:pt x="1726595" y="2603713"/>
+                  </a:lnTo>
+                  <a:lnTo>
+                    <a:pt x="1798217" y="2591021"/>
+                  </a:lnTo>
+                  <a:lnTo>
+                    <a:pt x="1869840" y="2578146"/>
+                  </a:lnTo>
+                  <a:lnTo>
+                    <a:pt x="1941462" y="2565085"/>
+                  </a:lnTo>
+                  <a:lnTo>
+                    <a:pt x="2013085" y="2551836"/>
+                  </a:lnTo>
+                  <a:lnTo>
+                    <a:pt x="2084708" y="2538396"/>
+                  </a:lnTo>
+                  <a:lnTo>
+                    <a:pt x="2156330" y="2524762"/>
+                  </a:lnTo>
+                  <a:lnTo>
+                    <a:pt x="2227953" y="2510931"/>
+                  </a:lnTo>
+                  <a:lnTo>
+                    <a:pt x="2299575" y="2496901"/>
+                  </a:lnTo>
+                  <a:lnTo>
+                    <a:pt x="2371198" y="2482669"/>
+                  </a:lnTo>
+                  <a:lnTo>
+                    <a:pt x="2442820" y="2468231"/>
+                  </a:lnTo>
+                  <a:lnTo>
+                    <a:pt x="2514443" y="2453585"/>
+                  </a:lnTo>
+                  <a:lnTo>
+                    <a:pt x="2586065" y="2438728"/>
+                  </a:lnTo>
+                  <a:lnTo>
+                    <a:pt x="2657688" y="2423657"/>
+                  </a:lnTo>
+                  <a:lnTo>
+                    <a:pt x="2729310" y="2408368"/>
+                  </a:lnTo>
+                  <a:lnTo>
+                    <a:pt x="2800933" y="2392858"/>
+                  </a:lnTo>
+                  <a:lnTo>
+                    <a:pt x="2872555" y="2377126"/>
+                  </a:lnTo>
+                  <a:lnTo>
+                    <a:pt x="2944178" y="2361166"/>
+                  </a:lnTo>
+                  <a:lnTo>
+                    <a:pt x="3015800" y="2344976"/>
+                  </a:lnTo>
+                  <a:lnTo>
+                    <a:pt x="3087423" y="2328552"/>
+                  </a:lnTo>
+                  <a:lnTo>
+                    <a:pt x="3159045" y="2311892"/>
+                  </a:lnTo>
+                  <a:lnTo>
+                    <a:pt x="3230668" y="2294991"/>
+                  </a:lnTo>
+                  <a:lnTo>
+                    <a:pt x="3302290" y="2277847"/>
+                  </a:lnTo>
+                  <a:lnTo>
+                    <a:pt x="3373913" y="2260455"/>
+                  </a:lnTo>
+                  <a:lnTo>
+                    <a:pt x="3445536" y="2242812"/>
+                  </a:lnTo>
+                  <a:lnTo>
+                    <a:pt x="3517158" y="2224916"/>
+                  </a:lnTo>
+                  <a:lnTo>
+                    <a:pt x="3588781" y="2206760"/>
+                  </a:lnTo>
+                  <a:lnTo>
+                    <a:pt x="3660403" y="2188344"/>
+                  </a:lnTo>
+                  <a:lnTo>
+                    <a:pt x="3732026" y="2169661"/>
+                  </a:lnTo>
+                  <a:lnTo>
+                    <a:pt x="3803648" y="2150709"/>
+                  </a:lnTo>
+                  <a:lnTo>
+                    <a:pt x="3875271" y="2131484"/>
+                  </a:lnTo>
+                  <a:lnTo>
+                    <a:pt x="3946893" y="2111981"/>
+                  </a:lnTo>
+                  <a:lnTo>
+                    <a:pt x="4018516" y="2092198"/>
+                  </a:lnTo>
+                  <a:lnTo>
+                    <a:pt x="4090138" y="2072128"/>
+                  </a:lnTo>
+                  <a:lnTo>
+                    <a:pt x="4161761" y="2051770"/>
+                  </a:lnTo>
+                  <a:lnTo>
+                    <a:pt x="4233383" y="2031118"/>
+                  </a:lnTo>
+                  <a:lnTo>
+                    <a:pt x="4305006" y="2010168"/>
+                  </a:lnTo>
+                  <a:lnTo>
+                    <a:pt x="4376628" y="1988915"/>
+                  </a:lnTo>
+                  <a:lnTo>
+                    <a:pt x="4448251" y="1967357"/>
+                  </a:lnTo>
+                  <a:lnTo>
+                    <a:pt x="4519873" y="1945487"/>
+                  </a:lnTo>
+                  <a:lnTo>
+                    <a:pt x="4591496" y="1923302"/>
+                  </a:lnTo>
+                  <a:lnTo>
+                    <a:pt x="4663118" y="1900797"/>
+                  </a:lnTo>
+                  <a:lnTo>
+                    <a:pt x="4734741" y="1877968"/>
+                  </a:lnTo>
+                  <a:lnTo>
+                    <a:pt x="4806363" y="1854809"/>
+                  </a:lnTo>
+                  <a:lnTo>
+                    <a:pt x="4877986" y="1831316"/>
+                  </a:lnTo>
+                  <a:lnTo>
+                    <a:pt x="4949609" y="1807485"/>
+                  </a:lnTo>
+                  <a:lnTo>
+                    <a:pt x="5021231" y="1783309"/>
+                  </a:lnTo>
+                  <a:lnTo>
+                    <a:pt x="5092854" y="1758785"/>
+                  </a:lnTo>
+                  <a:lnTo>
+                    <a:pt x="5164476" y="1733908"/>
+                  </a:lnTo>
+                  <a:lnTo>
+                    <a:pt x="5236099" y="1708671"/>
+                  </a:lnTo>
+                  <a:lnTo>
+                    <a:pt x="5307721" y="1683071"/>
+                  </a:lnTo>
+                  <a:lnTo>
+                    <a:pt x="5379344" y="1657101"/>
                   </a:lnTo>
                 </a:path>
               </a:pathLst>
@@ -3820,312 +3820,312 @@
           </p:nvSpPr>
           <p:spPr>
             <a:xfrm>
-              <a:off x="1172049" y="4735891"/>
-              <a:ext cx="7090630" cy="805632"/>
+              <a:off x="1172049" y="4735673"/>
+              <a:ext cx="7090630" cy="805772"/>
             </a:xfrm>
             <a:custGeom>
               <a:avLst/>
               <a:pathLst>
-                <a:path w="7090630" h="805632">
+                <a:path w="7090630" h="805772">
                   <a:moveTo>
-                    <a:pt x="7090630" y="805632"/>
+                    <a:pt x="7090630" y="805772"/>
                   </a:moveTo>
                   <a:lnTo>
-                    <a:pt x="7019007" y="804460"/>
-                  </a:lnTo>
-                  <a:lnTo>
-                    <a:pt x="6947385" y="803200"/>
-                  </a:lnTo>
-                  <a:lnTo>
-                    <a:pt x="6875762" y="801846"/>
-                  </a:lnTo>
-                  <a:lnTo>
-                    <a:pt x="6804139" y="800390"/>
-                  </a:lnTo>
-                  <a:lnTo>
-                    <a:pt x="6732517" y="798827"/>
-                  </a:lnTo>
-                  <a:lnTo>
-                    <a:pt x="6660894" y="797147"/>
-                  </a:lnTo>
-                  <a:lnTo>
-                    <a:pt x="6589272" y="795341"/>
-                  </a:lnTo>
-                  <a:lnTo>
-                    <a:pt x="6517649" y="793401"/>
-                  </a:lnTo>
-                  <a:lnTo>
-                    <a:pt x="6446027" y="791316"/>
-                  </a:lnTo>
-                  <a:lnTo>
-                    <a:pt x="6374404" y="789076"/>
-                  </a:lnTo>
-                  <a:lnTo>
-                    <a:pt x="6302782" y="786669"/>
-                  </a:lnTo>
-                  <a:lnTo>
-                    <a:pt x="6231159" y="784082"/>
-                  </a:lnTo>
-                  <a:lnTo>
-                    <a:pt x="6159537" y="781302"/>
-                  </a:lnTo>
-                  <a:lnTo>
-                    <a:pt x="6087914" y="778315"/>
-                  </a:lnTo>
-                  <a:lnTo>
-                    <a:pt x="6016292" y="775106"/>
-                  </a:lnTo>
-                  <a:lnTo>
-                    <a:pt x="5944669" y="771657"/>
-                  </a:lnTo>
-                  <a:lnTo>
-                    <a:pt x="5873047" y="767950"/>
-                  </a:lnTo>
-                  <a:lnTo>
-                    <a:pt x="5801424" y="763968"/>
-                  </a:lnTo>
-                  <a:lnTo>
-                    <a:pt x="5729802" y="759688"/>
-                  </a:lnTo>
-                  <a:lnTo>
-                    <a:pt x="5658179" y="755089"/>
-                  </a:lnTo>
-                  <a:lnTo>
-                    <a:pt x="5586557" y="750148"/>
-                  </a:lnTo>
-                  <a:lnTo>
-                    <a:pt x="5514934" y="744838"/>
-                  </a:lnTo>
-                  <a:lnTo>
-                    <a:pt x="5443311" y="739131"/>
-                  </a:lnTo>
-                  <a:lnTo>
-                    <a:pt x="5371689" y="733000"/>
-                  </a:lnTo>
-                  <a:lnTo>
-                    <a:pt x="5300066" y="726411"/>
-                  </a:lnTo>
-                  <a:lnTo>
-                    <a:pt x="5228444" y="719330"/>
-                  </a:lnTo>
-                  <a:lnTo>
-                    <a:pt x="5156821" y="711722"/>
-                  </a:lnTo>
-                  <a:lnTo>
-                    <a:pt x="5085199" y="703546"/>
-                  </a:lnTo>
-                  <a:lnTo>
-                    <a:pt x="5013576" y="694761"/>
-                  </a:lnTo>
-                  <a:lnTo>
-                    <a:pt x="4941954" y="685321"/>
-                  </a:lnTo>
-                  <a:lnTo>
-                    <a:pt x="4870331" y="675176"/>
-                  </a:lnTo>
-                  <a:lnTo>
-                    <a:pt x="4798709" y="664275"/>
-                  </a:lnTo>
-                  <a:lnTo>
-                    <a:pt x="4727086" y="652562"/>
-                  </a:lnTo>
-                  <a:lnTo>
-                    <a:pt x="4655464" y="639974"/>
-                  </a:lnTo>
-                  <a:lnTo>
-                    <a:pt x="4583841" y="626449"/>
-                  </a:lnTo>
-                  <a:lnTo>
-                    <a:pt x="4512219" y="611914"/>
-                  </a:lnTo>
-                  <a:lnTo>
-                    <a:pt x="4440596" y="596296"/>
-                  </a:lnTo>
-                  <a:lnTo>
-                    <a:pt x="4368974" y="579513"/>
-                  </a:lnTo>
-                  <a:lnTo>
-                    <a:pt x="4297351" y="561478"/>
-                  </a:lnTo>
-                  <a:lnTo>
-                    <a:pt x="4225729" y="542099"/>
-                  </a:lnTo>
-                  <a:lnTo>
-                    <a:pt x="4154106" y="521274"/>
-                  </a:lnTo>
-                  <a:lnTo>
-                    <a:pt x="4082483" y="498897"/>
-                  </a:lnTo>
-                  <a:lnTo>
-                    <a:pt x="4010861" y="474850"/>
-                  </a:lnTo>
-                  <a:lnTo>
-                    <a:pt x="3939238" y="449011"/>
-                  </a:lnTo>
-                  <a:lnTo>
-                    <a:pt x="3867616" y="421245"/>
-                  </a:lnTo>
-                  <a:lnTo>
-                    <a:pt x="3795993" y="391408"/>
-                  </a:lnTo>
-                  <a:lnTo>
-                    <a:pt x="3724371" y="359346"/>
-                  </a:lnTo>
-                  <a:lnTo>
-                    <a:pt x="3652748" y="324894"/>
-                  </a:lnTo>
-                  <a:lnTo>
-                    <a:pt x="3581126" y="287872"/>
-                  </a:lnTo>
-                  <a:lnTo>
-                    <a:pt x="3509503" y="248090"/>
-                  </a:lnTo>
-                  <a:lnTo>
-                    <a:pt x="3437881" y="205341"/>
-                  </a:lnTo>
-                  <a:lnTo>
-                    <a:pt x="3366258" y="159404"/>
-                  </a:lnTo>
-                  <a:lnTo>
-                    <a:pt x="3294636" y="110042"/>
-                  </a:lnTo>
-                  <a:lnTo>
-                    <a:pt x="3223013" y="56998"/>
+                    <a:pt x="7019007" y="804595"/>
+                  </a:lnTo>
+                  <a:lnTo>
+                    <a:pt x="6947385" y="803330"/>
+                  </a:lnTo>
+                  <a:lnTo>
+                    <a:pt x="6875762" y="801971"/>
+                  </a:lnTo>
+                  <a:lnTo>
+                    <a:pt x="6804139" y="800511"/>
+                  </a:lnTo>
+                  <a:lnTo>
+                    <a:pt x="6732517" y="798942"/>
+                  </a:lnTo>
+                  <a:lnTo>
+                    <a:pt x="6660894" y="797256"/>
+                  </a:lnTo>
+                  <a:lnTo>
+                    <a:pt x="6589272" y="795445"/>
+                  </a:lnTo>
+                  <a:lnTo>
+                    <a:pt x="6517649" y="793499"/>
+                  </a:lnTo>
+                  <a:lnTo>
+                    <a:pt x="6446027" y="791408"/>
+                  </a:lnTo>
+                  <a:lnTo>
+                    <a:pt x="6374404" y="789161"/>
+                  </a:lnTo>
+                  <a:lnTo>
+                    <a:pt x="6302782" y="786747"/>
+                  </a:lnTo>
+                  <a:lnTo>
+                    <a:pt x="6231159" y="784153"/>
+                  </a:lnTo>
+                  <a:lnTo>
+                    <a:pt x="6159537" y="781365"/>
+                  </a:lnTo>
+                  <a:lnTo>
+                    <a:pt x="6087914" y="778370"/>
+                  </a:lnTo>
+                  <a:lnTo>
+                    <a:pt x="6016292" y="775153"/>
+                  </a:lnTo>
+                  <a:lnTo>
+                    <a:pt x="5944669" y="771695"/>
+                  </a:lnTo>
+                  <a:lnTo>
+                    <a:pt x="5873047" y="767980"/>
+                  </a:lnTo>
+                  <a:lnTo>
+                    <a:pt x="5801424" y="763988"/>
+                  </a:lnTo>
+                  <a:lnTo>
+                    <a:pt x="5729802" y="759699"/>
+                  </a:lnTo>
+                  <a:lnTo>
+                    <a:pt x="5658179" y="755091"/>
+                  </a:lnTo>
+                  <a:lnTo>
+                    <a:pt x="5586557" y="750139"/>
+                  </a:lnTo>
+                  <a:lnTo>
+                    <a:pt x="5514934" y="744818"/>
+                  </a:lnTo>
+                  <a:lnTo>
+                    <a:pt x="5443311" y="739102"/>
+                  </a:lnTo>
+                  <a:lnTo>
+                    <a:pt x="5371689" y="732959"/>
+                  </a:lnTo>
+                  <a:lnTo>
+                    <a:pt x="5300066" y="726359"/>
+                  </a:lnTo>
+                  <a:lnTo>
+                    <a:pt x="5228444" y="719267"/>
+                  </a:lnTo>
+                  <a:lnTo>
+                    <a:pt x="5156821" y="711647"/>
+                  </a:lnTo>
+                  <a:lnTo>
+                    <a:pt x="5085199" y="703460"/>
+                  </a:lnTo>
+                  <a:lnTo>
+                    <a:pt x="5013576" y="694663"/>
+                  </a:lnTo>
+                  <a:lnTo>
+                    <a:pt x="4941954" y="685211"/>
+                  </a:lnTo>
+                  <a:lnTo>
+                    <a:pt x="4870331" y="675054"/>
+                  </a:lnTo>
+                  <a:lnTo>
+                    <a:pt x="4798709" y="664142"/>
+                  </a:lnTo>
+                  <a:lnTo>
+                    <a:pt x="4727086" y="652416"/>
+                  </a:lnTo>
+                  <a:lnTo>
+                    <a:pt x="4655464" y="639817"/>
+                  </a:lnTo>
+                  <a:lnTo>
+                    <a:pt x="4583841" y="626280"/>
+                  </a:lnTo>
+                  <a:lnTo>
+                    <a:pt x="4512219" y="611735"/>
+                  </a:lnTo>
+                  <a:lnTo>
+                    <a:pt x="4440596" y="596106"/>
+                  </a:lnTo>
+                  <a:lnTo>
+                    <a:pt x="4368974" y="579314"/>
+                  </a:lnTo>
+                  <a:lnTo>
+                    <a:pt x="4297351" y="561270"/>
+                  </a:lnTo>
+                  <a:lnTo>
+                    <a:pt x="4225729" y="541883"/>
+                  </a:lnTo>
+                  <a:lnTo>
+                    <a:pt x="4154106" y="521052"/>
+                  </a:lnTo>
+                  <a:lnTo>
+                    <a:pt x="4082483" y="498669"/>
+                  </a:lnTo>
+                  <a:lnTo>
+                    <a:pt x="4010861" y="474620"/>
+                  </a:lnTo>
+                  <a:lnTo>
+                    <a:pt x="3939238" y="448779"/>
+                  </a:lnTo>
+                  <a:lnTo>
+                    <a:pt x="3867616" y="421013"/>
+                  </a:lnTo>
+                  <a:lnTo>
+                    <a:pt x="3795993" y="391180"/>
+                  </a:lnTo>
+                  <a:lnTo>
+                    <a:pt x="3724371" y="359125"/>
+                  </a:lnTo>
+                  <a:lnTo>
+                    <a:pt x="3652748" y="324682"/>
+                  </a:lnTo>
+                  <a:lnTo>
+                    <a:pt x="3581126" y="287674"/>
+                  </a:lnTo>
+                  <a:lnTo>
+                    <a:pt x="3509503" y="247910"/>
+                  </a:lnTo>
+                  <a:lnTo>
+                    <a:pt x="3437881" y="205184"/>
+                  </a:lnTo>
+                  <a:lnTo>
+                    <a:pt x="3366258" y="159276"/>
+                  </a:lnTo>
+                  <a:lnTo>
+                    <a:pt x="3294636" y="109949"/>
+                  </a:lnTo>
+                  <a:lnTo>
+                    <a:pt x="3223013" y="56948"/>
                   </a:lnTo>
                   <a:lnTo>
                     <a:pt x="3151391" y="0"/>
                   </a:lnTo>
                   <a:lnTo>
-                    <a:pt x="3079768" y="1775"/>
-                  </a:lnTo>
-                  <a:lnTo>
-                    <a:pt x="3008146" y="13071"/>
-                  </a:lnTo>
-                  <a:lnTo>
-                    <a:pt x="2936523" y="24211"/>
-                  </a:lnTo>
-                  <a:lnTo>
-                    <a:pt x="2864901" y="35198"/>
-                  </a:lnTo>
-                  <a:lnTo>
-                    <a:pt x="2793278" y="46033"/>
-                  </a:lnTo>
-                  <a:lnTo>
-                    <a:pt x="2721655" y="56719"/>
-                  </a:lnTo>
-                  <a:lnTo>
-                    <a:pt x="2650033" y="67257"/>
-                  </a:lnTo>
-                  <a:lnTo>
-                    <a:pt x="2578410" y="77651"/>
-                  </a:lnTo>
-                  <a:lnTo>
-                    <a:pt x="2506788" y="87901"/>
-                  </a:lnTo>
-                  <a:lnTo>
-                    <a:pt x="2435165" y="98010"/>
-                  </a:lnTo>
-                  <a:lnTo>
-                    <a:pt x="2363543" y="107979"/>
-                  </a:lnTo>
-                  <a:lnTo>
-                    <a:pt x="2291920" y="117811"/>
-                  </a:lnTo>
-                  <a:lnTo>
-                    <a:pt x="2220298" y="127508"/>
-                  </a:lnTo>
-                  <a:lnTo>
-                    <a:pt x="2148675" y="137071"/>
-                  </a:lnTo>
-                  <a:lnTo>
-                    <a:pt x="2077053" y="146502"/>
-                  </a:lnTo>
-                  <a:lnTo>
-                    <a:pt x="2005430" y="155803"/>
-                  </a:lnTo>
-                  <a:lnTo>
-                    <a:pt x="1933808" y="164976"/>
-                  </a:lnTo>
-                  <a:lnTo>
-                    <a:pt x="1862185" y="174022"/>
-                  </a:lnTo>
-                  <a:lnTo>
-                    <a:pt x="1790563" y="182944"/>
-                  </a:lnTo>
-                  <a:lnTo>
-                    <a:pt x="1718940" y="191743"/>
-                  </a:lnTo>
-                  <a:lnTo>
-                    <a:pt x="1647318" y="200421"/>
-                  </a:lnTo>
-                  <a:lnTo>
-                    <a:pt x="1575695" y="208979"/>
-                  </a:lnTo>
-                  <a:lnTo>
-                    <a:pt x="1504073" y="217419"/>
-                  </a:lnTo>
-                  <a:lnTo>
-                    <a:pt x="1432450" y="225743"/>
-                  </a:lnTo>
-                  <a:lnTo>
-                    <a:pt x="1360827" y="233952"/>
-                  </a:lnTo>
-                  <a:lnTo>
-                    <a:pt x="1289205" y="242047"/>
-                  </a:lnTo>
-                  <a:lnTo>
-                    <a:pt x="1217582" y="250032"/>
-                  </a:lnTo>
-                  <a:lnTo>
-                    <a:pt x="1145960" y="257906"/>
-                  </a:lnTo>
-                  <a:lnTo>
-                    <a:pt x="1074337" y="265672"/>
-                  </a:lnTo>
-                  <a:lnTo>
-                    <a:pt x="1002715" y="273330"/>
-                  </a:lnTo>
-                  <a:lnTo>
-                    <a:pt x="931092" y="280884"/>
-                  </a:lnTo>
-                  <a:lnTo>
-                    <a:pt x="859470" y="288333"/>
-                  </a:lnTo>
-                  <a:lnTo>
-                    <a:pt x="787847" y="295679"/>
-                  </a:lnTo>
-                  <a:lnTo>
-                    <a:pt x="716225" y="302924"/>
-                  </a:lnTo>
-                  <a:lnTo>
-                    <a:pt x="644602" y="310069"/>
-                  </a:lnTo>
-                  <a:lnTo>
-                    <a:pt x="572980" y="317116"/>
-                  </a:lnTo>
-                  <a:lnTo>
-                    <a:pt x="501357" y="324066"/>
-                  </a:lnTo>
-                  <a:lnTo>
-                    <a:pt x="429735" y="330920"/>
-                  </a:lnTo>
-                  <a:lnTo>
-                    <a:pt x="358112" y="337679"/>
-                  </a:lnTo>
-                  <a:lnTo>
-                    <a:pt x="286490" y="344345"/>
-                  </a:lnTo>
-                  <a:lnTo>
-                    <a:pt x="214867" y="350920"/>
-                  </a:lnTo>
-                  <a:lnTo>
-                    <a:pt x="143245" y="357404"/>
-                  </a:lnTo>
-                  <a:lnTo>
-                    <a:pt x="71622" y="363798"/>
-                  </a:lnTo>
-                  <a:lnTo>
-                    <a:pt x="0" y="370104"/>
+                    <a:pt x="3079768" y="2346"/>
+                  </a:lnTo>
+                  <a:lnTo>
+                    <a:pt x="3008146" y="13993"/>
+                  </a:lnTo>
+                  <a:lnTo>
+                    <a:pt x="2936523" y="25475"/>
+                  </a:lnTo>
+                  <a:lnTo>
+                    <a:pt x="2864901" y="36793"/>
+                  </a:lnTo>
+                  <a:lnTo>
+                    <a:pt x="2793278" y="47951"/>
+                  </a:lnTo>
+                  <a:lnTo>
+                    <a:pt x="2721655" y="58949"/>
+                  </a:lnTo>
+                  <a:lnTo>
+                    <a:pt x="2650033" y="69792"/>
+                  </a:lnTo>
+                  <a:lnTo>
+                    <a:pt x="2578410" y="80480"/>
+                  </a:lnTo>
+                  <a:lnTo>
+                    <a:pt x="2506788" y="91016"/>
+                  </a:lnTo>
+                  <a:lnTo>
+                    <a:pt x="2435165" y="101403"/>
+                  </a:lnTo>
+                  <a:lnTo>
+                    <a:pt x="2363543" y="111641"/>
+                  </a:lnTo>
+                  <a:lnTo>
+                    <a:pt x="2291920" y="121735"/>
+                  </a:lnTo>
+                  <a:lnTo>
+                    <a:pt x="2220298" y="131684"/>
+                  </a:lnTo>
+                  <a:lnTo>
+                    <a:pt x="2148675" y="141493"/>
+                  </a:lnTo>
+                  <a:lnTo>
+                    <a:pt x="2077053" y="151161"/>
+                  </a:lnTo>
+                  <a:lnTo>
+                    <a:pt x="2005430" y="160693"/>
+                  </a:lnTo>
+                  <a:lnTo>
+                    <a:pt x="1933808" y="170089"/>
+                  </a:lnTo>
+                  <a:lnTo>
+                    <a:pt x="1862185" y="179351"/>
+                  </a:lnTo>
+                  <a:lnTo>
+                    <a:pt x="1790563" y="188481"/>
+                  </a:lnTo>
+                  <a:lnTo>
+                    <a:pt x="1718940" y="197482"/>
+                  </a:lnTo>
+                  <a:lnTo>
+                    <a:pt x="1647318" y="206355"/>
+                  </a:lnTo>
+                  <a:lnTo>
+                    <a:pt x="1575695" y="215102"/>
+                  </a:lnTo>
+                  <a:lnTo>
+                    <a:pt x="1504073" y="223724"/>
+                  </a:lnTo>
+                  <a:lnTo>
+                    <a:pt x="1432450" y="232224"/>
+                  </a:lnTo>
+                  <a:lnTo>
+                    <a:pt x="1360827" y="240603"/>
+                  </a:lnTo>
+                  <a:lnTo>
+                    <a:pt x="1289205" y="248862"/>
+                  </a:lnTo>
+                  <a:lnTo>
+                    <a:pt x="1217582" y="257005"/>
+                  </a:lnTo>
+                  <a:lnTo>
+                    <a:pt x="1145960" y="265031"/>
+                  </a:lnTo>
+                  <a:lnTo>
+                    <a:pt x="1074337" y="272944"/>
+                  </a:lnTo>
+                  <a:lnTo>
+                    <a:pt x="1002715" y="280744"/>
+                  </a:lnTo>
+                  <a:lnTo>
+                    <a:pt x="931092" y="288433"/>
+                  </a:lnTo>
+                  <a:lnTo>
+                    <a:pt x="859470" y="296013"/>
+                  </a:lnTo>
+                  <a:lnTo>
+                    <a:pt x="787847" y="303485"/>
+                  </a:lnTo>
+                  <a:lnTo>
+                    <a:pt x="716225" y="310850"/>
+                  </a:lnTo>
+                  <a:lnTo>
+                    <a:pt x="644602" y="318111"/>
+                  </a:lnTo>
+                  <a:lnTo>
+                    <a:pt x="572980" y="325269"/>
+                  </a:lnTo>
+                  <a:lnTo>
+                    <a:pt x="501357" y="332325"/>
+                  </a:lnTo>
+                  <a:lnTo>
+                    <a:pt x="429735" y="339281"/>
+                  </a:lnTo>
+                  <a:lnTo>
+                    <a:pt x="358112" y="346138"/>
+                  </a:lnTo>
+                  <a:lnTo>
+                    <a:pt x="286490" y="352897"/>
+                  </a:lnTo>
+                  <a:lnTo>
+                    <a:pt x="214867" y="359560"/>
+                  </a:lnTo>
+                  <a:lnTo>
+                    <a:pt x="143245" y="366129"/>
+                  </a:lnTo>
+                  <a:lnTo>
+                    <a:pt x="71622" y="372604"/>
+                  </a:lnTo>
+                  <a:lnTo>
+                    <a:pt x="0" y="378987"/>
                   </a:lnTo>
                 </a:path>
               </a:pathLst>
@@ -4145,312 +4145,312 @@
           </p:nvSpPr>
           <p:spPr>
             <a:xfrm>
-              <a:off x="1172049" y="2594830"/>
-              <a:ext cx="7090630" cy="2794977"/>
+              <a:off x="1172049" y="2628548"/>
+              <a:ext cx="7090630" cy="2758793"/>
             </a:xfrm>
             <a:custGeom>
               <a:avLst/>
               <a:pathLst>
-                <a:path w="7090630" h="2794977">
+                <a:path w="7090630" h="2758793">
                   <a:moveTo>
                     <a:pt x="0" y="0"/>
                   </a:moveTo>
                   <a:lnTo>
-                    <a:pt x="71622" y="84738"/>
-                  </a:lnTo>
-                  <a:lnTo>
-                    <a:pt x="143245" y="167052"/>
-                  </a:lnTo>
-                  <a:lnTo>
-                    <a:pt x="214867" y="247012"/>
-                  </a:lnTo>
-                  <a:lnTo>
-                    <a:pt x="286490" y="324684"/>
-                  </a:lnTo>
-                  <a:lnTo>
-                    <a:pt x="358112" y="400135"/>
-                  </a:lnTo>
-                  <a:lnTo>
-                    <a:pt x="429735" y="473428"/>
-                  </a:lnTo>
-                  <a:lnTo>
-                    <a:pt x="501357" y="544624"/>
-                  </a:lnTo>
-                  <a:lnTo>
-                    <a:pt x="572980" y="613783"/>
-                  </a:lnTo>
-                  <a:lnTo>
-                    <a:pt x="644602" y="680965"/>
-                  </a:lnTo>
-                  <a:lnTo>
-                    <a:pt x="716225" y="746224"/>
-                  </a:lnTo>
-                  <a:lnTo>
-                    <a:pt x="787847" y="809617"/>
-                  </a:lnTo>
-                  <a:lnTo>
-                    <a:pt x="859470" y="871197"/>
-                  </a:lnTo>
-                  <a:lnTo>
-                    <a:pt x="931092" y="931015"/>
-                  </a:lnTo>
-                  <a:lnTo>
-                    <a:pt x="1002715" y="989122"/>
-                  </a:lnTo>
-                  <a:lnTo>
-                    <a:pt x="1074337" y="1045567"/>
-                  </a:lnTo>
-                  <a:lnTo>
-                    <a:pt x="1145960" y="1100398"/>
-                  </a:lnTo>
-                  <a:lnTo>
-                    <a:pt x="1217582" y="1153660"/>
-                  </a:lnTo>
-                  <a:lnTo>
-                    <a:pt x="1289205" y="1205398"/>
-                  </a:lnTo>
-                  <a:lnTo>
-                    <a:pt x="1360827" y="1255657"/>
-                  </a:lnTo>
-                  <a:lnTo>
-                    <a:pt x="1432450" y="1304477"/>
-                  </a:lnTo>
-                  <a:lnTo>
-                    <a:pt x="1504073" y="1351902"/>
-                  </a:lnTo>
-                  <a:lnTo>
-                    <a:pt x="1575695" y="1397970"/>
-                  </a:lnTo>
-                  <a:lnTo>
-                    <a:pt x="1647318" y="1442720"/>
-                  </a:lnTo>
-                  <a:lnTo>
-                    <a:pt x="1718940" y="1486190"/>
-                  </a:lnTo>
-                  <a:lnTo>
-                    <a:pt x="1790563" y="1528417"/>
-                  </a:lnTo>
-                  <a:lnTo>
-                    <a:pt x="1862185" y="1569435"/>
-                  </a:lnTo>
-                  <a:lnTo>
-                    <a:pt x="1933808" y="1609281"/>
-                  </a:lnTo>
-                  <a:lnTo>
-                    <a:pt x="2005430" y="1647987"/>
-                  </a:lnTo>
-                  <a:lnTo>
-                    <a:pt x="2077053" y="1685585"/>
-                  </a:lnTo>
-                  <a:lnTo>
-                    <a:pt x="2148675" y="1722108"/>
-                  </a:lnTo>
-                  <a:lnTo>
-                    <a:pt x="2220298" y="1757587"/>
-                  </a:lnTo>
-                  <a:lnTo>
-                    <a:pt x="2291920" y="1792050"/>
-                  </a:lnTo>
-                  <a:lnTo>
-                    <a:pt x="2363543" y="1825528"/>
-                  </a:lnTo>
-                  <a:lnTo>
-                    <a:pt x="2435165" y="1858048"/>
-                  </a:lnTo>
-                  <a:lnTo>
-                    <a:pt x="2506788" y="1889638"/>
-                  </a:lnTo>
-                  <a:lnTo>
-                    <a:pt x="2578410" y="1920324"/>
-                  </a:lnTo>
-                  <a:lnTo>
-                    <a:pt x="2650033" y="1950132"/>
-                  </a:lnTo>
-                  <a:lnTo>
-                    <a:pt x="2721655" y="1979088"/>
-                  </a:lnTo>
-                  <a:lnTo>
-                    <a:pt x="2793278" y="2007216"/>
-                  </a:lnTo>
-                  <a:lnTo>
-                    <a:pt x="2864901" y="2034539"/>
-                  </a:lnTo>
-                  <a:lnTo>
-                    <a:pt x="2936523" y="2061080"/>
-                  </a:lnTo>
-                  <a:lnTo>
-                    <a:pt x="3008146" y="2086863"/>
-                  </a:lnTo>
-                  <a:lnTo>
-                    <a:pt x="3079768" y="2111907"/>
-                  </a:lnTo>
-                  <a:lnTo>
-                    <a:pt x="3151391" y="2136236"/>
-                  </a:lnTo>
-                  <a:lnTo>
-                    <a:pt x="3223013" y="2159868"/>
-                  </a:lnTo>
-                  <a:lnTo>
-                    <a:pt x="3294636" y="2182825"/>
-                  </a:lnTo>
-                  <a:lnTo>
-                    <a:pt x="3366258" y="2205125"/>
-                  </a:lnTo>
-                  <a:lnTo>
-                    <a:pt x="3437881" y="2226787"/>
-                  </a:lnTo>
-                  <a:lnTo>
-                    <a:pt x="3509503" y="2247829"/>
-                  </a:lnTo>
-                  <a:lnTo>
-                    <a:pt x="3581126" y="2268269"/>
-                  </a:lnTo>
-                  <a:lnTo>
-                    <a:pt x="3652748" y="2288125"/>
-                  </a:lnTo>
-                  <a:lnTo>
-                    <a:pt x="3724371" y="2307413"/>
-                  </a:lnTo>
-                  <a:lnTo>
-                    <a:pt x="3795993" y="2326149"/>
-                  </a:lnTo>
-                  <a:lnTo>
-                    <a:pt x="3867616" y="2344349"/>
-                  </a:lnTo>
-                  <a:lnTo>
-                    <a:pt x="3939238" y="2362029"/>
-                  </a:lnTo>
-                  <a:lnTo>
-                    <a:pt x="4010861" y="2379202"/>
-                  </a:lnTo>
-                  <a:lnTo>
-                    <a:pt x="4082483" y="2395885"/>
-                  </a:lnTo>
-                  <a:lnTo>
-                    <a:pt x="4154106" y="2412090"/>
-                  </a:lnTo>
-                  <a:lnTo>
-                    <a:pt x="4225729" y="2427832"/>
-                  </a:lnTo>
-                  <a:lnTo>
-                    <a:pt x="4297351" y="2443124"/>
-                  </a:lnTo>
-                  <a:lnTo>
-                    <a:pt x="4368974" y="2457978"/>
-                  </a:lnTo>
-                  <a:lnTo>
-                    <a:pt x="4440596" y="2472407"/>
-                  </a:lnTo>
-                  <a:lnTo>
-                    <a:pt x="4512219" y="2486424"/>
-                  </a:lnTo>
-                  <a:lnTo>
-                    <a:pt x="4583841" y="2500039"/>
-                  </a:lnTo>
-                  <a:lnTo>
-                    <a:pt x="4655464" y="2513265"/>
-                  </a:lnTo>
-                  <a:lnTo>
-                    <a:pt x="4727086" y="2526113"/>
-                  </a:lnTo>
-                  <a:lnTo>
-                    <a:pt x="4798709" y="2538593"/>
-                  </a:lnTo>
-                  <a:lnTo>
-                    <a:pt x="4870331" y="2550717"/>
-                  </a:lnTo>
-                  <a:lnTo>
-                    <a:pt x="4941954" y="2562493"/>
-                  </a:lnTo>
-                  <a:lnTo>
-                    <a:pt x="5013576" y="2573933"/>
-                  </a:lnTo>
-                  <a:lnTo>
-                    <a:pt x="5085199" y="2585045"/>
-                  </a:lnTo>
-                  <a:lnTo>
-                    <a:pt x="5156821" y="2595840"/>
-                  </a:lnTo>
-                  <a:lnTo>
-                    <a:pt x="5228444" y="2606325"/>
-                  </a:lnTo>
-                  <a:lnTo>
-                    <a:pt x="5300066" y="2616511"/>
-                  </a:lnTo>
-                  <a:lnTo>
-                    <a:pt x="5371689" y="2626406"/>
-                  </a:lnTo>
-                  <a:lnTo>
-                    <a:pt x="5443311" y="2636017"/>
-                  </a:lnTo>
-                  <a:lnTo>
-                    <a:pt x="5514934" y="2645354"/>
-                  </a:lnTo>
-                  <a:lnTo>
-                    <a:pt x="5586557" y="2654423"/>
-                  </a:lnTo>
-                  <a:lnTo>
-                    <a:pt x="5658179" y="2663233"/>
-                  </a:lnTo>
-                  <a:lnTo>
-                    <a:pt x="5729802" y="2671791"/>
-                  </a:lnTo>
-                  <a:lnTo>
-                    <a:pt x="5801424" y="2680105"/>
-                  </a:lnTo>
-                  <a:lnTo>
-                    <a:pt x="5873047" y="2688180"/>
-                  </a:lnTo>
-                  <a:lnTo>
-                    <a:pt x="5944669" y="2696024"/>
-                  </a:lnTo>
-                  <a:lnTo>
-                    <a:pt x="6016292" y="2703645"/>
-                  </a:lnTo>
-                  <a:lnTo>
-                    <a:pt x="6087914" y="2711047"/>
-                  </a:lnTo>
-                  <a:lnTo>
-                    <a:pt x="6159537" y="2718237"/>
-                  </a:lnTo>
-                  <a:lnTo>
-                    <a:pt x="6231159" y="2725222"/>
-                  </a:lnTo>
-                  <a:lnTo>
-                    <a:pt x="6302782" y="2732007"/>
-                  </a:lnTo>
-                  <a:lnTo>
-                    <a:pt x="6374404" y="2738597"/>
-                  </a:lnTo>
-                  <a:lnTo>
-                    <a:pt x="6446027" y="2745000"/>
-                  </a:lnTo>
-                  <a:lnTo>
-                    <a:pt x="6517649" y="2751219"/>
-                  </a:lnTo>
-                  <a:lnTo>
-                    <a:pt x="6589272" y="2757260"/>
-                  </a:lnTo>
-                  <a:lnTo>
-                    <a:pt x="6660894" y="2763129"/>
-                  </a:lnTo>
-                  <a:lnTo>
-                    <a:pt x="6732517" y="2768829"/>
-                  </a:lnTo>
-                  <a:lnTo>
-                    <a:pt x="6804139" y="2774367"/>
-                  </a:lnTo>
-                  <a:lnTo>
-                    <a:pt x="6875762" y="2779746"/>
-                  </a:lnTo>
-                  <a:lnTo>
-                    <a:pt x="6947385" y="2784971"/>
-                  </a:lnTo>
-                  <a:lnTo>
-                    <a:pt x="7019007" y="2790047"/>
-                  </a:lnTo>
-                  <a:lnTo>
-                    <a:pt x="7090630" y="2794977"/>
+                    <a:pt x="71622" y="83024"/>
+                  </a:lnTo>
+                  <a:lnTo>
+                    <a:pt x="143245" y="163695"/>
+                  </a:lnTo>
+                  <a:lnTo>
+                    <a:pt x="214867" y="242079"/>
+                  </a:lnTo>
+                  <a:lnTo>
+                    <a:pt x="286490" y="318241"/>
+                  </a:lnTo>
+                  <a:lnTo>
+                    <a:pt x="358112" y="392244"/>
+                  </a:lnTo>
+                  <a:lnTo>
+                    <a:pt x="429735" y="464149"/>
+                  </a:lnTo>
+                  <a:lnTo>
+                    <a:pt x="501357" y="534016"/>
+                  </a:lnTo>
+                  <a:lnTo>
+                    <a:pt x="572980" y="601902"/>
+                  </a:lnTo>
+                  <a:lnTo>
+                    <a:pt x="644602" y="667863"/>
+                  </a:lnTo>
+                  <a:lnTo>
+                    <a:pt x="716225" y="731955"/>
+                  </a:lnTo>
+                  <a:lnTo>
+                    <a:pt x="787847" y="794229"/>
+                  </a:lnTo>
+                  <a:lnTo>
+                    <a:pt x="859470" y="854739"/>
+                  </a:lnTo>
+                  <a:lnTo>
+                    <a:pt x="931092" y="913532"/>
+                  </a:lnTo>
+                  <a:lnTo>
+                    <a:pt x="1002715" y="970660"/>
+                  </a:lnTo>
+                  <a:lnTo>
+                    <a:pt x="1074337" y="1026167"/>
+                  </a:lnTo>
+                  <a:lnTo>
+                    <a:pt x="1145960" y="1080102"/>
+                  </a:lnTo>
+                  <a:lnTo>
+                    <a:pt x="1217582" y="1132507"/>
+                  </a:lnTo>
+                  <a:lnTo>
+                    <a:pt x="1289205" y="1183426"/>
+                  </a:lnTo>
+                  <a:lnTo>
+                    <a:pt x="1360827" y="1232902"/>
+                  </a:lnTo>
+                  <a:lnTo>
+                    <a:pt x="1432450" y="1280976"/>
+                  </a:lnTo>
+                  <a:lnTo>
+                    <a:pt x="1504073" y="1327687"/>
+                  </a:lnTo>
+                  <a:lnTo>
+                    <a:pt x="1575695" y="1373073"/>
+                  </a:lnTo>
+                  <a:lnTo>
+                    <a:pt x="1647318" y="1417173"/>
+                  </a:lnTo>
+                  <a:lnTo>
+                    <a:pt x="1718940" y="1460023"/>
+                  </a:lnTo>
+                  <a:lnTo>
+                    <a:pt x="1790563" y="1501658"/>
+                  </a:lnTo>
+                  <a:lnTo>
+                    <a:pt x="1862185" y="1542112"/>
+                  </a:lnTo>
+                  <a:lnTo>
+                    <a:pt x="1933808" y="1581420"/>
+                  </a:lnTo>
+                  <a:lnTo>
+                    <a:pt x="2005430" y="1619614"/>
+                  </a:lnTo>
+                  <a:lnTo>
+                    <a:pt x="2077053" y="1656725"/>
+                  </a:lnTo>
+                  <a:lnTo>
+                    <a:pt x="2148675" y="1692783"/>
+                  </a:lnTo>
+                  <a:lnTo>
+                    <a:pt x="2220298" y="1727820"/>
+                  </a:lnTo>
+                  <a:lnTo>
+                    <a:pt x="2291920" y="1761863"/>
+                  </a:lnTo>
+                  <a:lnTo>
+                    <a:pt x="2363543" y="1794941"/>
+                  </a:lnTo>
+                  <a:lnTo>
+                    <a:pt x="2435165" y="1827082"/>
+                  </a:lnTo>
+                  <a:lnTo>
+                    <a:pt x="2506788" y="1858311"/>
+                  </a:lnTo>
+                  <a:lnTo>
+                    <a:pt x="2578410" y="1888655"/>
+                  </a:lnTo>
+                  <a:lnTo>
+                    <a:pt x="2650033" y="1918139"/>
+                  </a:lnTo>
+                  <a:lnTo>
+                    <a:pt x="2721655" y="1946787"/>
+                  </a:lnTo>
+                  <a:lnTo>
+                    <a:pt x="2793278" y="1974623"/>
+                  </a:lnTo>
+                  <a:lnTo>
+                    <a:pt x="2864901" y="2001670"/>
+                  </a:lnTo>
+                  <a:lnTo>
+                    <a:pt x="2936523" y="2027950"/>
+                  </a:lnTo>
+                  <a:lnTo>
+                    <a:pt x="3008146" y="2053485"/>
+                  </a:lnTo>
+                  <a:lnTo>
+                    <a:pt x="3079768" y="2078296"/>
+                  </a:lnTo>
+                  <a:lnTo>
+                    <a:pt x="3151391" y="2102404"/>
+                  </a:lnTo>
+                  <a:lnTo>
+                    <a:pt x="3223013" y="2125828"/>
+                  </a:lnTo>
+                  <a:lnTo>
+                    <a:pt x="3294636" y="2148588"/>
+                  </a:lnTo>
+                  <a:lnTo>
+                    <a:pt x="3366258" y="2170704"/>
+                  </a:lnTo>
+                  <a:lnTo>
+                    <a:pt x="3437881" y="2192192"/>
+                  </a:lnTo>
+                  <a:lnTo>
+                    <a:pt x="3509503" y="2213071"/>
+                  </a:lnTo>
+                  <a:lnTo>
+                    <a:pt x="3581126" y="2233358"/>
+                  </a:lnTo>
+                  <a:lnTo>
+                    <a:pt x="3652748" y="2253070"/>
+                  </a:lnTo>
+                  <a:lnTo>
+                    <a:pt x="3724371" y="2272223"/>
+                  </a:lnTo>
+                  <a:lnTo>
+                    <a:pt x="3795993" y="2290833"/>
+                  </a:lnTo>
+                  <a:lnTo>
+                    <a:pt x="3867616" y="2308916"/>
+                  </a:lnTo>
+                  <a:lnTo>
+                    <a:pt x="3939238" y="2326486"/>
+                  </a:lnTo>
+                  <a:lnTo>
+                    <a:pt x="4010861" y="2343558"/>
+                  </a:lnTo>
+                  <a:lnTo>
+                    <a:pt x="4082483" y="2360146"/>
+                  </a:lnTo>
+                  <a:lnTo>
+                    <a:pt x="4154106" y="2376264"/>
+                  </a:lnTo>
+                  <a:lnTo>
+                    <a:pt x="4225729" y="2391924"/>
+                  </a:lnTo>
+                  <a:lnTo>
+                    <a:pt x="4297351" y="2407141"/>
+                  </a:lnTo>
+                  <a:lnTo>
+                    <a:pt x="4368974" y="2421927"/>
+                  </a:lnTo>
+                  <a:lnTo>
+                    <a:pt x="4440596" y="2436293"/>
+                  </a:lnTo>
+                  <a:lnTo>
+                    <a:pt x="4512219" y="2450252"/>
+                  </a:lnTo>
+                  <a:lnTo>
+                    <a:pt x="4583841" y="2463815"/>
+                  </a:lnTo>
+                  <a:lnTo>
+                    <a:pt x="4655464" y="2476994"/>
+                  </a:lnTo>
+                  <a:lnTo>
+                    <a:pt x="4727086" y="2489800"/>
+                  </a:lnTo>
+                  <a:lnTo>
+                    <a:pt x="4798709" y="2502242"/>
+                  </a:lnTo>
+                  <a:lnTo>
+                    <a:pt x="4870331" y="2514331"/>
+                  </a:lnTo>
+                  <a:lnTo>
+                    <a:pt x="4941954" y="2526078"/>
+                  </a:lnTo>
+                  <a:lnTo>
+                    <a:pt x="5013576" y="2537492"/>
+                  </a:lnTo>
+                  <a:lnTo>
+                    <a:pt x="5085199" y="2548582"/>
+                  </a:lnTo>
+                  <a:lnTo>
+                    <a:pt x="5156821" y="2559358"/>
+                  </a:lnTo>
+                  <a:lnTo>
+                    <a:pt x="5228444" y="2569828"/>
+                  </a:lnTo>
+                  <a:lnTo>
+                    <a:pt x="5300066" y="2580002"/>
+                  </a:lnTo>
+                  <a:lnTo>
+                    <a:pt x="5371689" y="2589887"/>
+                  </a:lnTo>
+                  <a:lnTo>
+                    <a:pt x="5443311" y="2599492"/>
+                  </a:lnTo>
+                  <a:lnTo>
+                    <a:pt x="5514934" y="2608825"/>
+                  </a:lnTo>
+                  <a:lnTo>
+                    <a:pt x="5586557" y="2617893"/>
+                  </a:lnTo>
+                  <a:lnTo>
+                    <a:pt x="5658179" y="2626704"/>
+                  </a:lnTo>
+                  <a:lnTo>
+                    <a:pt x="5729802" y="2635265"/>
+                  </a:lnTo>
+                  <a:lnTo>
+                    <a:pt x="5801424" y="2643583"/>
+                  </a:lnTo>
+                  <a:lnTo>
+                    <a:pt x="5873047" y="2651666"/>
+                  </a:lnTo>
+                  <a:lnTo>
+                    <a:pt x="5944669" y="2659519"/>
+                  </a:lnTo>
+                  <a:lnTo>
+                    <a:pt x="6016292" y="2667150"/>
+                  </a:lnTo>
+                  <a:lnTo>
+                    <a:pt x="6087914" y="2674565"/>
+                  </a:lnTo>
+                  <a:lnTo>
+                    <a:pt x="6159537" y="2681769"/>
+                  </a:lnTo>
+                  <a:lnTo>
+                    <a:pt x="6231159" y="2688770"/>
+                  </a:lnTo>
+                  <a:lnTo>
+                    <a:pt x="6302782" y="2695571"/>
+                  </a:lnTo>
+                  <a:lnTo>
+                    <a:pt x="6374404" y="2702180"/>
+                  </a:lnTo>
+                  <a:lnTo>
+                    <a:pt x="6446027" y="2708602"/>
+                  </a:lnTo>
+                  <a:lnTo>
+                    <a:pt x="6517649" y="2714841"/>
+                  </a:lnTo>
+                  <a:lnTo>
+                    <a:pt x="6589272" y="2720904"/>
+                  </a:lnTo>
+                  <a:lnTo>
+                    <a:pt x="6660894" y="2726795"/>
+                  </a:lnTo>
+                  <a:lnTo>
+                    <a:pt x="6732517" y="2732518"/>
+                  </a:lnTo>
+                  <a:lnTo>
+                    <a:pt x="6804139" y="2738080"/>
+                  </a:lnTo>
+                  <a:lnTo>
+                    <a:pt x="6875762" y="2743484"/>
+                  </a:lnTo>
+                  <a:lnTo>
+                    <a:pt x="6947385" y="2748734"/>
+                  </a:lnTo>
+                  <a:lnTo>
+                    <a:pt x="7019007" y="2753836"/>
+                  </a:lnTo>
+                  <a:lnTo>
+                    <a:pt x="7090630" y="2758793"/>
                   </a:lnTo>
                 </a:path>
               </a:pathLst>
@@ -4522,7 +4522,7 @@
           </p:nvSpPr>
           <p:spPr>
             <a:xfrm>
-              <a:off x="4313661" y="2073503"/>
+              <a:off x="4313914" y="2073503"/>
               <a:ext cx="0" cy="3649639"/>
             </a:xfrm>
             <a:custGeom>
@@ -4795,7 +4795,7 @@
           </p:nvSpPr>
           <p:spPr>
             <a:xfrm>
-              <a:off x="2280620" y="5785772"/>
+              <a:off x="2281218" y="5785772"/>
               <a:ext cx="161574" cy="80101"/>
             </a:xfrm>
             <a:prstGeom prst="rect">
@@ -4841,7 +4841,7 @@
           </p:nvSpPr>
           <p:spPr>
             <a:xfrm>
-              <a:off x="4204872" y="5785772"/>
+              <a:off x="4203472" y="5785772"/>
               <a:ext cx="62179" cy="80101"/>
             </a:xfrm>
             <a:prstGeom prst="rect">
@@ -4887,7 +4887,7 @@
           </p:nvSpPr>
           <p:spPr>
             <a:xfrm>
-              <a:off x="6048338" y="5785772"/>
+              <a:off x="6044938" y="5785772"/>
               <a:ext cx="124358" cy="80101"/>
             </a:xfrm>
             <a:prstGeom prst="rect">
@@ -4933,7 +4933,7 @@
           </p:nvSpPr>
           <p:spPr>
             <a:xfrm>
-              <a:off x="7922893" y="5785772"/>
+              <a:off x="7917494" y="5785772"/>
               <a:ext cx="124358" cy="80101"/>
             </a:xfrm>
             <a:prstGeom prst="rect">
@@ -5104,7 +5104,7 @@
                   <a:latin typeface="Helvetica"/>
                   <a:cs typeface="Helvetica"/>
                 </a:rPr>
-                <a:t>subHR per 10 % decline: 1.46 (0.83-2.56), p = 0.185  |  per IQR decline (Δ = 25.8 %): 2.67 (0.63-11.38)  |  IQR: [-10.7, 15.1] %</a:t>
+                <a:t>subHR per 10 % decline: 1.46 (0.83-2.56), p = 0.191  |  per IQR decline (Δ = 25.8 %): 2.64 (0.62-11.28)  |  IQR: [-10.6, 15.2] %</a:t>
               </a:r>
             </a:p>
           </p:txBody>
